--- a/docs/Prezentaciq_Finalen_Proekt.pptx
+++ b/docs/Prezentaciq_Finalen_Proekt.pptx
@@ -16,7 +16,7 @@
     <p:sldId id="264" r:id="rId15"/>
     <p:sldId id="265" r:id="rId16"/>
   </p:sldIdLst>
-  <p:sldSz cx="9144000" cy="6858000" type="screen4x3"/>
+  <p:sldSz cx="12191695" cy="6858000" type="screen4x3"/>
   <p:notesSz cx="6858000" cy="9144000"/>
   <p:defaultTextStyle>
     <a:defPPr>
@@ -3099,35 +3099,140 @@
       <p:grpSpPr/>
       <p:sp>
         <p:nvSpPr>
-          <p:cNvPr id="2" name="TextBox 1"/>
-          <p:cNvSpPr txBox="1"/>
+          <p:cNvPr id="2" name="Rectangle 1"/>
+          <p:cNvSpPr/>
           <p:nvPr/>
         </p:nvSpPr>
         <p:spPr>
           <a:xfrm>
-            <a:off x="914400" y="1828800"/>
-            <a:ext cx="7315200" cy="2926080"/>
+            <a:off x="0" y="0"/>
+            <a:ext cx="12191695" cy="6858000"/>
           </a:xfrm>
           <a:prstGeom prst="rect">
             <a:avLst/>
           </a:prstGeom>
-          <a:noFill/>
-        </p:spPr>
-        <p:txBody>
-          <a:bodyPr wrap="square">
-            <a:spAutoFit/>
-          </a:bodyPr>
-          <a:lstStyle/>
-          <a:p>
-            <a:pPr>
-              <a:defRPr sz="1400" b="1">
-                <a:solidFill>
-                  <a:srgbClr val="2563EB"/>
-                </a:solidFill>
-              </a:defRPr>
-            </a:pPr>
-            <a:r>
-              <a:t>ФИНАЛЕН КУРСОВ ПРОЕКТ ПО CSCB700</a:t>
+          <a:solidFill>
+            <a:srgbClr val="F8FAFC"/>
+          </a:solidFill>
+          <a:ln>
+            <a:noFill/>
+          </a:ln>
+        </p:spPr>
+        <p:style>
+          <a:lnRef idx="1">
+            <a:schemeClr val="accent1"/>
+          </a:lnRef>
+          <a:fillRef idx="3">
+            <a:schemeClr val="accent1"/>
+          </a:fillRef>
+          <a:effectRef idx="2">
+            <a:schemeClr val="accent1"/>
+          </a:effectRef>
+          <a:fontRef idx="minor">
+            <a:schemeClr val="lt1"/>
+          </a:fontRef>
+        </p:style>
+        <p:txBody>
+          <a:bodyPr rtlCol="0" anchor="ctr"/>
+          <a:lstStyle/>
+          <a:p>
+            <a:pPr algn="ctr"/>
+          </a:p>
+        </p:txBody>
+      </p:sp>
+      <p:sp>
+        <p:nvSpPr>
+          <p:cNvPr id="3" name="Rectangle 2"/>
+          <p:cNvSpPr/>
+          <p:nvPr/>
+        </p:nvSpPr>
+        <p:spPr>
+          <a:xfrm>
+            <a:off x="0" y="0"/>
+            <a:ext cx="12191695" cy="109728"/>
+          </a:xfrm>
+          <a:prstGeom prst="rect">
+            <a:avLst/>
+          </a:prstGeom>
+          <a:solidFill>
+            <a:srgbClr val="0284C7"/>
+          </a:solidFill>
+          <a:ln>
+            <a:noFill/>
+          </a:ln>
+        </p:spPr>
+        <p:style>
+          <a:lnRef idx="1">
+            <a:schemeClr val="accent1"/>
+          </a:lnRef>
+          <a:fillRef idx="3">
+            <a:schemeClr val="accent1"/>
+          </a:fillRef>
+          <a:effectRef idx="2">
+            <a:schemeClr val="accent1"/>
+          </a:effectRef>
+          <a:fontRef idx="minor">
+            <a:schemeClr val="lt1"/>
+          </a:fontRef>
+        </p:style>
+        <p:txBody>
+          <a:bodyPr rtlCol="0" anchor="ctr"/>
+          <a:lstStyle/>
+          <a:p>
+            <a:pPr algn="ctr"/>
+          </a:p>
+        </p:txBody>
+      </p:sp>
+      <p:sp>
+        <p:nvSpPr>
+          <p:cNvPr id="4" name="Rounded Rectangle 3"/>
+          <p:cNvSpPr/>
+          <p:nvPr/>
+        </p:nvSpPr>
+        <p:spPr>
+          <a:xfrm>
+            <a:off x="1097280" y="1097280"/>
+            <a:ext cx="9966960" cy="4663440"/>
+          </a:xfrm>
+          <a:prstGeom prst="roundRect">
+            <a:avLst/>
+          </a:prstGeom>
+          <a:solidFill>
+            <a:srgbClr val="FFFFFF"/>
+          </a:solidFill>
+          <a:ln w="19050">
+            <a:solidFill>
+              <a:srgbClr val="E2E8F0"/>
+            </a:solidFill>
+          </a:ln>
+        </p:spPr>
+        <p:style>
+          <a:lnRef idx="1">
+            <a:schemeClr val="accent1"/>
+          </a:lnRef>
+          <a:fillRef idx="3">
+            <a:schemeClr val="accent1"/>
+          </a:fillRef>
+          <a:effectRef idx="2">
+            <a:schemeClr val="accent1"/>
+          </a:effectRef>
+          <a:fontRef idx="minor">
+            <a:schemeClr val="lt1"/>
+          </a:fontRef>
+        </p:style>
+        <p:txBody>
+          <a:bodyPr rtlCol="0" anchor="ctr" wrap="square" lIns="731520" tIns="731520" rIns="731520"/>
+          <a:lstStyle/>
+          <a:p>
+            <a:pPr algn="ctr">
+              <a:defRPr sz="1300" b="1">
+                <a:solidFill>
+                  <a:srgbClr val="0284C7"/>
+                </a:solidFill>
+              </a:defRPr>
+            </a:pPr>
+            <a:r>
+              <a:t>ФИНАЛЕН КУРСОВ ПРОЕКТ • CSCB700</a:t>
             </a:r>
           </a:p>
           <a:p>
@@ -3135,37 +3240,63 @@
               <a:spcBef>
                 <a:spcPts val="1200"/>
               </a:spcBef>
-              <a:defRPr sz="2600" b="1">
+              <a:defRPr sz="2800" b="1">
+                <a:solidFill>
+                  <a:srgbClr val="1E3A8A"/>
+                </a:solidFill>
+              </a:defRPr>
+            </a:pPr>
+            <a:r>
+              <a:t>Цялостна SEO оптимизация и разработка на уебсайт за автомобилна електроника</a:t>
+            </a:r>
+          </a:p>
+          <a:p>
+            <a:pPr>
+              <a:spcBef>
+                <a:spcPts val="2800"/>
+              </a:spcBef>
+              <a:defRPr sz="1400" b="1">
                 <a:solidFill>
                   <a:srgbClr val="0F172A"/>
                 </a:solidFill>
               </a:defRPr>
             </a:pPr>
             <a:r>
-              <a:t>Цялостна SEO оптимизация и разработка на уебсайт за автомобилна електроника</a:t>
+              <a:t>Проект: AutoElektronik (https://autoelektronik-service.bg)</a:t>
             </a:r>
           </a:p>
           <a:p>
             <a:pPr>
               <a:spcBef>
-                <a:spcPts val="2000"/>
+                <a:spcPts val="600"/>
               </a:spcBef>
-              <a:defRPr sz="1400">
-                <a:solidFill>
-                  <a:srgbClr val="64748B"/>
-                </a:solidFill>
-              </a:defRPr>
-            </a:pPr>
-            <a:r>
-              <a:t>Сайт: AutoElektronik (https://autoelektronik-service.bg)</a:t>
+              <a:defRPr sz="1300">
+                <a:solidFill>
+                  <a:srgbClr val="475569"/>
+                </a:solidFill>
+              </a:defRPr>
+            </a:pPr>
+            <a:r>
+              <a:t>Дисциплина: CSCB700 — Оптимизация за търсачки в уеб (SEO)</a:t>
             </a:r>
             <a:br/>
             <a:r>
-              <a:t>Преподавател: по конспект CSCB700</a:t>
-            </a:r>
-            <a:br/>
-            <a:r>
               <a:t>Нов български университет</a:t>
+            </a:r>
+          </a:p>
+          <a:p>
+            <a:pPr>
+              <a:spcBef>
+                <a:spcPts val="1000"/>
+              </a:spcBef>
+              <a:defRPr sz="1400" b="1">
+                <a:solidFill>
+                  <a:srgbClr val="1E3A8A"/>
+                </a:solidFill>
+              </a:defRPr>
+            </a:pPr>
+            <a:r>
+              <a:t>Преподавател: Елисавета Тричкова-Кашъмова</a:t>
             </a:r>
           </a:p>
         </p:txBody>
@@ -3190,14 +3321,100 @@
       <p:grpSpPr/>
       <p:sp>
         <p:nvSpPr>
-          <p:cNvPr id="2" name="TextBox 1"/>
+          <p:cNvPr id="2" name="Rectangle 1"/>
+          <p:cNvSpPr/>
+          <p:nvPr/>
+        </p:nvSpPr>
+        <p:spPr>
+          <a:xfrm>
+            <a:off x="0" y="0"/>
+            <a:ext cx="12191695" cy="6858000"/>
+          </a:xfrm>
+          <a:prstGeom prst="rect">
+            <a:avLst/>
+          </a:prstGeom>
+          <a:solidFill>
+            <a:srgbClr val="F8FAFC"/>
+          </a:solidFill>
+          <a:ln>
+            <a:noFill/>
+          </a:ln>
+        </p:spPr>
+        <p:style>
+          <a:lnRef idx="1">
+            <a:schemeClr val="accent1"/>
+          </a:lnRef>
+          <a:fillRef idx="3">
+            <a:schemeClr val="accent1"/>
+          </a:fillRef>
+          <a:effectRef idx="2">
+            <a:schemeClr val="accent1"/>
+          </a:effectRef>
+          <a:fontRef idx="minor">
+            <a:schemeClr val="lt1"/>
+          </a:fontRef>
+        </p:style>
+        <p:txBody>
+          <a:bodyPr rtlCol="0" anchor="ctr"/>
+          <a:lstStyle/>
+          <a:p>
+            <a:pPr algn="ctr"/>
+          </a:p>
+        </p:txBody>
+      </p:sp>
+      <p:sp>
+        <p:nvSpPr>
+          <p:cNvPr id="3" name="Rectangle 2"/>
+          <p:cNvSpPr/>
+          <p:nvPr/>
+        </p:nvSpPr>
+        <p:spPr>
+          <a:xfrm>
+            <a:off x="0" y="0"/>
+            <a:ext cx="12191695" cy="109728"/>
+          </a:xfrm>
+          <a:prstGeom prst="rect">
+            <a:avLst/>
+          </a:prstGeom>
+          <a:solidFill>
+            <a:srgbClr val="0284C7"/>
+          </a:solidFill>
+          <a:ln>
+            <a:noFill/>
+          </a:ln>
+        </p:spPr>
+        <p:style>
+          <a:lnRef idx="1">
+            <a:schemeClr val="accent1"/>
+          </a:lnRef>
+          <a:fillRef idx="3">
+            <a:schemeClr val="accent1"/>
+          </a:fillRef>
+          <a:effectRef idx="2">
+            <a:schemeClr val="accent1"/>
+          </a:effectRef>
+          <a:fontRef idx="minor">
+            <a:schemeClr val="lt1"/>
+          </a:fontRef>
+        </p:style>
+        <p:txBody>
+          <a:bodyPr rtlCol="0" anchor="ctr"/>
+          <a:lstStyle/>
+          <a:p>
+            <a:pPr algn="ctr"/>
+          </a:p>
+        </p:txBody>
+      </p:sp>
+      <p:sp>
+        <p:nvSpPr>
+          <p:cNvPr id="4" name="TextBox 3"/>
           <p:cNvSpPr txBox="1"/>
           <p:nvPr/>
         </p:nvSpPr>
         <p:spPr>
           <a:xfrm>
-            <a:off x="731520" y="457200"/>
-            <a:ext cx="7680960" cy="1097280"/>
+            <a:off x="731520" y="365760"/>
+            <a:ext cx="10698480" cy="1005840"/>
           </a:xfrm>
           <a:prstGeom prst="rect">
             <a:avLst/>
@@ -3205,7 +3422,7 @@
           <a:noFill/>
         </p:spPr>
         <p:txBody>
-          <a:bodyPr wrap="square">
+          <a:bodyPr wrap="square" lIns="0" tIns="0" rIns="0" bIns="0">
             <a:spAutoFit/>
           </a:bodyPr>
           <a:lstStyle/>
@@ -3213,38 +3430,41 @@
             <a:pPr>
               <a:defRPr sz="1100" b="1">
                 <a:solidFill>
-                  <a:srgbClr val="2563EB"/>
-                </a:solidFill>
-              </a:defRPr>
-            </a:pPr>
-            <a:r>
-              <a:t>CSCB700 - ОПТИМИЗАЦИЯ ЗА ТЪРСАЧКИ В УЕБ</a:t>
-            </a:r>
-          </a:p>
-          <a:p>
-            <a:pPr>
+                  <a:srgbClr val="0284C7"/>
+                </a:solidFill>
+              </a:defRPr>
+            </a:pPr>
+            <a:r>
+              <a:t>CSCB700 • ОПТИМИЗАЦИЯ ЗА ТЪРСАЧКИ В УЕБ</a:t>
+            </a:r>
+          </a:p>
+          <a:p>
+            <a:pPr>
+              <a:spcBef>
+                <a:spcPts val="400"/>
+              </a:spcBef>
               <a:defRPr sz="2200" b="1">
                 <a:solidFill>
-                  <a:srgbClr val="0F172A"/>
-                </a:solidFill>
-              </a:defRPr>
-            </a:pPr>
-            <a:r>
-              <a:t>9. Обобщение на постигнатите резултати</a:t>
-            </a:r>
-          </a:p>
-        </p:txBody>
-      </p:sp>
-      <p:sp>
-        <p:nvSpPr>
-          <p:cNvPr id="3" name="TextBox 2"/>
+                  <a:srgbClr val="1E3A8A"/>
+                </a:solidFill>
+              </a:defRPr>
+            </a:pPr>
+            <a:r>
+              <a:t>Заключение и практически резултати</a:t>
+            </a:r>
+          </a:p>
+        </p:txBody>
+      </p:sp>
+      <p:sp>
+        <p:nvSpPr>
+          <p:cNvPr id="5" name="TextBox 4"/>
           <p:cNvSpPr txBox="1"/>
           <p:nvPr/>
         </p:nvSpPr>
         <p:spPr>
           <a:xfrm>
-            <a:off x="731520" y="1645920"/>
-            <a:ext cx="7680960" cy="4389120"/>
+            <a:off x="731520" y="6309360"/>
+            <a:ext cx="10698480" cy="365760"/>
           </a:xfrm>
           <a:prstGeom prst="rect">
             <a:avLst/>
@@ -3252,95 +3472,296 @@
           <a:noFill/>
         </p:spPr>
         <p:txBody>
-          <a:bodyPr wrap="square">
+          <a:bodyPr wrap="none" lIns="0" tIns="0" rIns="0" bIns="0">
             <a:spAutoFit/>
           </a:bodyPr>
           <a:lstStyle/>
           <a:p>
-            <a:r>
-              <a:rPr b="1" sz="1400">
-                <a:solidFill>
-                  <a:srgbClr val="1E293B"/>
-                </a:solidFill>
-              </a:rPr>
-              <a:t>Покрити изисквания: </a:t>
-            </a:r>
-            <a:r>
-              <a:rPr sz="1400">
+            <a:pPr>
+              <a:defRPr sz="1000">
+                <a:solidFill>
+                  <a:srgbClr val="94A3B8"/>
+                </a:solidFill>
+              </a:defRPr>
+            </a:pPr>
+            <a:r>
+              <a:t>AutoElektronik — Лабораторен сервиз за автоелектроника | Преподавател: Елисавета Тричкова-Кашъмова</a:t>
+            </a:r>
+          </a:p>
+        </p:txBody>
+      </p:sp>
+      <p:sp>
+        <p:nvSpPr>
+          <p:cNvPr id="6" name="Rounded Rectangle 5"/>
+          <p:cNvSpPr/>
+          <p:nvPr/>
+        </p:nvSpPr>
+        <p:spPr>
+          <a:xfrm>
+            <a:off x="731520" y="1554480"/>
+            <a:ext cx="5120640" cy="2103120"/>
+          </a:xfrm>
+          <a:prstGeom prst="roundRect">
+            <a:avLst/>
+          </a:prstGeom>
+          <a:solidFill>
+            <a:srgbClr val="FFFFFF"/>
+          </a:solidFill>
+          <a:ln w="19050">
+            <a:solidFill>
+              <a:srgbClr val="E2E8F0"/>
+            </a:solidFill>
+          </a:ln>
+        </p:spPr>
+        <p:style>
+          <a:lnRef idx="1">
+            <a:schemeClr val="accent1"/>
+          </a:lnRef>
+          <a:fillRef idx="3">
+            <a:schemeClr val="accent1"/>
+          </a:fillRef>
+          <a:effectRef idx="2">
+            <a:schemeClr val="accent1"/>
+          </a:effectRef>
+          <a:fontRef idx="minor">
+            <a:schemeClr val="lt1"/>
+          </a:fontRef>
+        </p:style>
+        <p:txBody>
+          <a:bodyPr rtlCol="0" anchor="ctr" wrap="square" lIns="228600" tIns="182880" rIns="228600" bIns="182880"/>
+          <a:lstStyle/>
+          <a:p>
+            <a:pPr algn="ctr">
+              <a:defRPr b="1" sz="1500">
+                <a:solidFill>
+                  <a:srgbClr val="1E3A8A"/>
+                </a:solidFill>
+              </a:defRPr>
+            </a:pPr>
+            <a:r>
+              <a:t>Успешно изпълнени цели</a:t>
+            </a:r>
+          </a:p>
+          <a:p>
+            <a:pPr>
+              <a:spcBef>
+                <a:spcPts val="600"/>
+              </a:spcBef>
+              <a:defRPr sz="1300">
                 <a:solidFill>
                   <a:srgbClr val="475569"/>
                 </a:solidFill>
-              </a:rPr>
-              <a:t>30 от 30 изисквания по конспекта на дисциплината CSCB700 са изпълнени и валидирани на 100%.</a:t>
+              </a:defRPr>
+            </a:pPr>
+            <a:r>
+              <a:t>Всички заложени параметри от учебния план са изпълнени качествено и проверени с автоматизирани инструменти за одит.</a:t>
+            </a:r>
+          </a:p>
+        </p:txBody>
+      </p:sp>
+      <p:sp>
+        <p:nvSpPr>
+          <p:cNvPr id="7" name="Rounded Rectangle 6"/>
+          <p:cNvSpPr/>
+          <p:nvPr/>
+        </p:nvSpPr>
+        <p:spPr>
+          <a:xfrm>
+            <a:off x="6309360" y="1554480"/>
+            <a:ext cx="5120640" cy="2103120"/>
+          </a:xfrm>
+          <a:prstGeom prst="roundRect">
+            <a:avLst/>
+          </a:prstGeom>
+          <a:solidFill>
+            <a:srgbClr val="FFFFFF"/>
+          </a:solidFill>
+          <a:ln w="19050">
+            <a:solidFill>
+              <a:srgbClr val="E2E8F0"/>
+            </a:solidFill>
+          </a:ln>
+        </p:spPr>
+        <p:style>
+          <a:lnRef idx="1">
+            <a:schemeClr val="accent1"/>
+          </a:lnRef>
+          <a:fillRef idx="3">
+            <a:schemeClr val="accent1"/>
+          </a:fillRef>
+          <a:effectRef idx="2">
+            <a:schemeClr val="accent1"/>
+          </a:effectRef>
+          <a:fontRef idx="minor">
+            <a:schemeClr val="lt1"/>
+          </a:fontRef>
+        </p:style>
+        <p:txBody>
+          <a:bodyPr rtlCol="0" anchor="ctr" wrap="square" lIns="228600" tIns="182880" rIns="228600" bIns="182880"/>
+          <a:lstStyle/>
+          <a:p>
+            <a:pPr algn="ctr">
+              <a:defRPr b="1" sz="1500">
+                <a:solidFill>
+                  <a:srgbClr val="1E3A8A"/>
+                </a:solidFill>
+              </a:defRPr>
+            </a:pPr>
+            <a:r>
+              <a:t>Оптимизационна матрица</a:t>
             </a:r>
           </a:p>
           <a:p>
             <a:pPr>
               <a:spcBef>
-                <a:spcPts val="1000"/>
+                <a:spcPts val="600"/>
               </a:spcBef>
-            </a:pPr>
-            <a:r>
-              <a:rPr b="1" sz="1400">
-                <a:solidFill>
-                  <a:srgbClr val="1E293B"/>
-                </a:solidFill>
-              </a:rPr>
-              <a:t>Университетска таблица (#28): </a:t>
-            </a:r>
-            <a:r>
-              <a:rPr sz="1400">
+              <a:defRPr sz="1300">
                 <a:solidFill>
                   <a:srgbClr val="475569"/>
                 </a:solidFill>
-              </a:rPr>
-              <a:t>Попълнена е цялостната оптимизационна матрица за всички 11 страници с ключови думи, мета данни и вътрешни линкове.</a:t>
+              </a:defRPr>
+            </a:pPr>
+            <a:r>
+              <a:t>Изготвена е подробна семантична таблица за всички 11 страници с реални ключови думи, метаданни и вътрешни връзки.</a:t>
+            </a:r>
+          </a:p>
+        </p:txBody>
+      </p:sp>
+      <p:sp>
+        <p:nvSpPr>
+          <p:cNvPr id="8" name="Rounded Rectangle 7"/>
+          <p:cNvSpPr/>
+          <p:nvPr/>
+        </p:nvSpPr>
+        <p:spPr>
+          <a:xfrm>
+            <a:off x="731520" y="3931920"/>
+            <a:ext cx="5120640" cy="2103120"/>
+          </a:xfrm>
+          <a:prstGeom prst="roundRect">
+            <a:avLst/>
+          </a:prstGeom>
+          <a:solidFill>
+            <a:srgbClr val="FFFFFF"/>
+          </a:solidFill>
+          <a:ln w="19050">
+            <a:solidFill>
+              <a:srgbClr val="E2E8F0"/>
+            </a:solidFill>
+          </a:ln>
+        </p:spPr>
+        <p:style>
+          <a:lnRef idx="1">
+            <a:schemeClr val="accent1"/>
+          </a:lnRef>
+          <a:fillRef idx="3">
+            <a:schemeClr val="accent1"/>
+          </a:fillRef>
+          <a:effectRef idx="2">
+            <a:schemeClr val="accent1"/>
+          </a:effectRef>
+          <a:fontRef idx="minor">
+            <a:schemeClr val="lt1"/>
+          </a:fontRef>
+        </p:style>
+        <p:txBody>
+          <a:bodyPr rtlCol="0" anchor="ctr" wrap="square" lIns="228600" tIns="182880" rIns="228600" bIns="182880"/>
+          <a:lstStyle/>
+          <a:p>
+            <a:pPr algn="ctr">
+              <a:defRPr b="1" sz="1500">
+                <a:solidFill>
+                  <a:srgbClr val="1E3A8A"/>
+                </a:solidFill>
+              </a:defRPr>
+            </a:pPr>
+            <a:r>
+              <a:t>Техническа надеждност</a:t>
             </a:r>
           </a:p>
           <a:p>
             <a:pPr>
               <a:spcBef>
-                <a:spcPts val="1000"/>
+                <a:spcPts val="600"/>
               </a:spcBef>
-            </a:pPr>
-            <a:r>
-              <a:rPr b="1" sz="1400">
-                <a:solidFill>
-                  <a:srgbClr val="1E293B"/>
-                </a:solidFill>
-              </a:rPr>
-              <a:t>Практическа стойност: </a:t>
-            </a:r>
-            <a:r>
-              <a:rPr sz="1400">
+              <a:defRPr sz="1300">
                 <a:solidFill>
                   <a:srgbClr val="475569"/>
                 </a:solidFill>
-              </a:rPr>
-              <a:t>Проектът не е просто учебна концепция, а напълно функционален, реален сайт с висока конверсионна готовност за клиенти.</a:t>
+              </a:defRPr>
+            </a:pPr>
+            <a:r>
+              <a:t>Сайтът постига максимални резултати за скорост и валидност, съчетавайки експертен текст с интерактивни инструменти.</a:t>
+            </a:r>
+          </a:p>
+        </p:txBody>
+      </p:sp>
+      <p:sp>
+        <p:nvSpPr>
+          <p:cNvPr id="9" name="Rounded Rectangle 8"/>
+          <p:cNvSpPr/>
+          <p:nvPr/>
+        </p:nvSpPr>
+        <p:spPr>
+          <a:xfrm>
+            <a:off x="6309360" y="3931920"/>
+            <a:ext cx="5120640" cy="2103120"/>
+          </a:xfrm>
+          <a:prstGeom prst="roundRect">
+            <a:avLst/>
+          </a:prstGeom>
+          <a:solidFill>
+            <a:srgbClr val="FFFFFF"/>
+          </a:solidFill>
+          <a:ln w="19050">
+            <a:solidFill>
+              <a:srgbClr val="E2E8F0"/>
+            </a:solidFill>
+          </a:ln>
+        </p:spPr>
+        <p:style>
+          <a:lnRef idx="1">
+            <a:schemeClr val="accent1"/>
+          </a:lnRef>
+          <a:fillRef idx="3">
+            <a:schemeClr val="accent1"/>
+          </a:fillRef>
+          <a:effectRef idx="2">
+            <a:schemeClr val="accent1"/>
+          </a:effectRef>
+          <a:fontRef idx="minor">
+            <a:schemeClr val="lt1"/>
+          </a:fontRef>
+        </p:style>
+        <p:txBody>
+          <a:bodyPr rtlCol="0" anchor="ctr" wrap="square" lIns="228600" tIns="182880" rIns="228600" bIns="182880"/>
+          <a:lstStyle/>
+          <a:p>
+            <a:pPr algn="ctr">
+              <a:defRPr b="1" sz="1500">
+                <a:solidFill>
+                  <a:srgbClr val="1E3A8A"/>
+                </a:solidFill>
+              </a:defRPr>
+            </a:pPr>
+            <a:r>
+              <a:t>Практически умения</a:t>
             </a:r>
           </a:p>
           <a:p>
             <a:pPr>
               <a:spcBef>
-                <a:spcPts val="1000"/>
+                <a:spcPts val="600"/>
               </a:spcBef>
-            </a:pPr>
-            <a:r>
-              <a:rPr b="1" sz="1400">
-                <a:solidFill>
-                  <a:srgbClr val="1E293B"/>
-                </a:solidFill>
-              </a:rPr>
-              <a:t>Готови материали: </a:t>
-            </a:r>
-            <a:r>
-              <a:rPr sz="1400">
+              <a:defRPr sz="1300">
                 <a:solidFill>
                   <a:srgbClr val="475569"/>
                 </a:solidFill>
-              </a:rPr>
-              <a:t>Сайтът е качен локално, документацията е структурирана и презентациите са готови за защита.</a:t>
+              </a:defRPr>
+            </a:pPr>
+            <a:r>
+              <a:t>Проектът демонстрира цялостните етапи по планиране, конкурентен анализ, он-пейдж оптимизация и техническо тестване.</a:t>
             </a:r>
           </a:p>
         </p:txBody>
@@ -3365,14 +3786,100 @@
       <p:grpSpPr/>
       <p:sp>
         <p:nvSpPr>
-          <p:cNvPr id="2" name="TextBox 1"/>
+          <p:cNvPr id="2" name="Rectangle 1"/>
+          <p:cNvSpPr/>
+          <p:nvPr/>
+        </p:nvSpPr>
+        <p:spPr>
+          <a:xfrm>
+            <a:off x="0" y="0"/>
+            <a:ext cx="12191695" cy="6858000"/>
+          </a:xfrm>
+          <a:prstGeom prst="rect">
+            <a:avLst/>
+          </a:prstGeom>
+          <a:solidFill>
+            <a:srgbClr val="F8FAFC"/>
+          </a:solidFill>
+          <a:ln>
+            <a:noFill/>
+          </a:ln>
+        </p:spPr>
+        <p:style>
+          <a:lnRef idx="1">
+            <a:schemeClr val="accent1"/>
+          </a:lnRef>
+          <a:fillRef idx="3">
+            <a:schemeClr val="accent1"/>
+          </a:fillRef>
+          <a:effectRef idx="2">
+            <a:schemeClr val="accent1"/>
+          </a:effectRef>
+          <a:fontRef idx="minor">
+            <a:schemeClr val="lt1"/>
+          </a:fontRef>
+        </p:style>
+        <p:txBody>
+          <a:bodyPr rtlCol="0" anchor="ctr"/>
+          <a:lstStyle/>
+          <a:p>
+            <a:pPr algn="ctr"/>
+          </a:p>
+        </p:txBody>
+      </p:sp>
+      <p:sp>
+        <p:nvSpPr>
+          <p:cNvPr id="3" name="Rectangle 2"/>
+          <p:cNvSpPr/>
+          <p:nvPr/>
+        </p:nvSpPr>
+        <p:spPr>
+          <a:xfrm>
+            <a:off x="0" y="0"/>
+            <a:ext cx="12191695" cy="109728"/>
+          </a:xfrm>
+          <a:prstGeom prst="rect">
+            <a:avLst/>
+          </a:prstGeom>
+          <a:solidFill>
+            <a:srgbClr val="0284C7"/>
+          </a:solidFill>
+          <a:ln>
+            <a:noFill/>
+          </a:ln>
+        </p:spPr>
+        <p:style>
+          <a:lnRef idx="1">
+            <a:schemeClr val="accent1"/>
+          </a:lnRef>
+          <a:fillRef idx="3">
+            <a:schemeClr val="accent1"/>
+          </a:fillRef>
+          <a:effectRef idx="2">
+            <a:schemeClr val="accent1"/>
+          </a:effectRef>
+          <a:fontRef idx="minor">
+            <a:schemeClr val="lt1"/>
+          </a:fontRef>
+        </p:style>
+        <p:txBody>
+          <a:bodyPr rtlCol="0" anchor="ctr"/>
+          <a:lstStyle/>
+          <a:p>
+            <a:pPr algn="ctr"/>
+          </a:p>
+        </p:txBody>
+      </p:sp>
+      <p:sp>
+        <p:nvSpPr>
+          <p:cNvPr id="4" name="TextBox 3"/>
           <p:cNvSpPr txBox="1"/>
           <p:nvPr/>
         </p:nvSpPr>
         <p:spPr>
           <a:xfrm>
-            <a:off x="731520" y="457200"/>
-            <a:ext cx="7680960" cy="1097280"/>
+            <a:off x="731520" y="365760"/>
+            <a:ext cx="10698480" cy="1005840"/>
           </a:xfrm>
           <a:prstGeom prst="rect">
             <a:avLst/>
@@ -3380,7 +3887,7 @@
           <a:noFill/>
         </p:spPr>
         <p:txBody>
-          <a:bodyPr wrap="square">
+          <a:bodyPr wrap="square" lIns="0" tIns="0" rIns="0" bIns="0">
             <a:spAutoFit/>
           </a:bodyPr>
           <a:lstStyle/>
@@ -3388,38 +3895,41 @@
             <a:pPr>
               <a:defRPr sz="1100" b="1">
                 <a:solidFill>
-                  <a:srgbClr val="2563EB"/>
-                </a:solidFill>
-              </a:defRPr>
-            </a:pPr>
-            <a:r>
-              <a:t>CSCB700 - ОПТИМИЗАЦИЯ ЗА ТЪРСАЧКИ В УЕБ</a:t>
-            </a:r>
-          </a:p>
-          <a:p>
-            <a:pPr>
+                  <a:srgbClr val="0284C7"/>
+                </a:solidFill>
+              </a:defRPr>
+            </a:pPr>
+            <a:r>
+              <a:t>CSCB700 • ОПТИМИЗАЦИЯ ЗА ТЪРСАЧКИ В УЕБ</a:t>
+            </a:r>
+          </a:p>
+          <a:p>
+            <a:pPr>
+              <a:spcBef>
+                <a:spcPts val="400"/>
+              </a:spcBef>
               <a:defRPr sz="2200" b="1">
                 <a:solidFill>
-                  <a:srgbClr val="0F172A"/>
-                </a:solidFill>
-              </a:defRPr>
-            </a:pPr>
-            <a:r>
-              <a:t>1. Преглед на реализирания проект</a:t>
-            </a:r>
-          </a:p>
-        </p:txBody>
-      </p:sp>
-      <p:sp>
-        <p:nvSpPr>
-          <p:cNvPr id="3" name="TextBox 2"/>
+                  <a:srgbClr val="1E3A8A"/>
+                </a:solidFill>
+              </a:defRPr>
+            </a:pPr>
+            <a:r>
+              <a:t>Обобщение на разработения уебсайт</a:t>
+            </a:r>
+          </a:p>
+        </p:txBody>
+      </p:sp>
+      <p:sp>
+        <p:nvSpPr>
+          <p:cNvPr id="5" name="TextBox 4"/>
           <p:cNvSpPr txBox="1"/>
           <p:nvPr/>
         </p:nvSpPr>
         <p:spPr>
           <a:xfrm>
-            <a:off x="731520" y="1645920"/>
-            <a:ext cx="7680960" cy="4389120"/>
+            <a:off x="731520" y="6309360"/>
+            <a:ext cx="10698480" cy="365760"/>
           </a:xfrm>
           <a:prstGeom prst="rect">
             <a:avLst/>
@@ -3427,95 +3937,296 @@
           <a:noFill/>
         </p:spPr>
         <p:txBody>
-          <a:bodyPr wrap="square">
+          <a:bodyPr wrap="none" lIns="0" tIns="0" rIns="0" bIns="0">
             <a:spAutoFit/>
           </a:bodyPr>
           <a:lstStyle/>
           <a:p>
-            <a:r>
-              <a:rPr b="1" sz="1400">
-                <a:solidFill>
-                  <a:srgbClr val="1E293B"/>
-                </a:solidFill>
-              </a:rPr>
-              <a:t>Сайтът AutoElektronik: </a:t>
-            </a:r>
-            <a:r>
-              <a:rPr sz="1400">
+            <a:pPr>
+              <a:defRPr sz="1000">
+                <a:solidFill>
+                  <a:srgbClr val="94A3B8"/>
+                </a:solidFill>
+              </a:defRPr>
+            </a:pPr>
+            <a:r>
+              <a:t>AutoElektronik — Лабораторен сервиз за автоелектроника | Преподавател: Елисавета Тричкова-Кашъмова</a:t>
+            </a:r>
+          </a:p>
+        </p:txBody>
+      </p:sp>
+      <p:sp>
+        <p:nvSpPr>
+          <p:cNvPr id="6" name="Rounded Rectangle 5"/>
+          <p:cNvSpPr/>
+          <p:nvPr/>
+        </p:nvSpPr>
+        <p:spPr>
+          <a:xfrm>
+            <a:off x="731520" y="1554480"/>
+            <a:ext cx="5120640" cy="2103120"/>
+          </a:xfrm>
+          <a:prstGeom prst="roundRect">
+            <a:avLst/>
+          </a:prstGeom>
+          <a:solidFill>
+            <a:srgbClr val="FFFFFF"/>
+          </a:solidFill>
+          <a:ln w="19050">
+            <a:solidFill>
+              <a:srgbClr val="E2E8F0"/>
+            </a:solidFill>
+          </a:ln>
+        </p:spPr>
+        <p:style>
+          <a:lnRef idx="1">
+            <a:schemeClr val="accent1"/>
+          </a:lnRef>
+          <a:fillRef idx="3">
+            <a:schemeClr val="accent1"/>
+          </a:fillRef>
+          <a:effectRef idx="2">
+            <a:schemeClr val="accent1"/>
+          </a:effectRef>
+          <a:fontRef idx="minor">
+            <a:schemeClr val="lt1"/>
+          </a:fontRef>
+        </p:style>
+        <p:txBody>
+          <a:bodyPr rtlCol="0" anchor="ctr" wrap="square" lIns="228600" tIns="182880" rIns="228600" bIns="182880"/>
+          <a:lstStyle/>
+          <a:p>
+            <a:pPr algn="ctr">
+              <a:defRPr b="1" sz="1500">
+                <a:solidFill>
+                  <a:srgbClr val="1E3A8A"/>
+                </a:solidFill>
+              </a:defRPr>
+            </a:pPr>
+            <a:r>
+              <a:t>Завършен цялостен проект</a:t>
+            </a:r>
+          </a:p>
+          <a:p>
+            <a:pPr>
+              <a:spcBef>
+                <a:spcPts val="600"/>
+              </a:spcBef>
+              <a:defRPr sz="1300">
                 <a:solidFill>
                   <a:srgbClr val="475569"/>
                 </a:solidFill>
-              </a:rPr>
-              <a:t>Напълно завършен специализиран уебсайт за сервиз на автоелектроника, изграден с Astro v4 и Tailwind CSS.</a:t>
+              </a:defRPr>
+            </a:pPr>
+            <a:r>
+              <a:t>Сайтът AutoElektronik е напълно функционален специализиран уебсайт за автоелектроника, изграден с Astro и Tailwind CSS.</a:t>
+            </a:r>
+          </a:p>
+        </p:txBody>
+      </p:sp>
+      <p:sp>
+        <p:nvSpPr>
+          <p:cNvPr id="7" name="Rounded Rectangle 6"/>
+          <p:cNvSpPr/>
+          <p:nvPr/>
+        </p:nvSpPr>
+        <p:spPr>
+          <a:xfrm>
+            <a:off x="6309360" y="1554480"/>
+            <a:ext cx="5120640" cy="2103120"/>
+          </a:xfrm>
+          <a:prstGeom prst="roundRect">
+            <a:avLst/>
+          </a:prstGeom>
+          <a:solidFill>
+            <a:srgbClr val="FFFFFF"/>
+          </a:solidFill>
+          <a:ln w="19050">
+            <a:solidFill>
+              <a:srgbClr val="E2E8F0"/>
+            </a:solidFill>
+          </a:ln>
+        </p:spPr>
+        <p:style>
+          <a:lnRef idx="1">
+            <a:schemeClr val="accent1"/>
+          </a:lnRef>
+          <a:fillRef idx="3">
+            <a:schemeClr val="accent1"/>
+          </a:fillRef>
+          <a:effectRef idx="2">
+            <a:schemeClr val="accent1"/>
+          </a:effectRef>
+          <a:fontRef idx="minor">
+            <a:schemeClr val="lt1"/>
+          </a:fontRef>
+        </p:style>
+        <p:txBody>
+          <a:bodyPr rtlCol="0" anchor="ctr" wrap="square" lIns="228600" tIns="182880" rIns="228600" bIns="182880"/>
+          <a:lstStyle/>
+          <a:p>
+            <a:pPr algn="ctr">
+              <a:defRPr b="1" sz="1500">
+                <a:solidFill>
+                  <a:srgbClr val="1E3A8A"/>
+                </a:solidFill>
+              </a:defRPr>
+            </a:pPr>
+            <a:r>
+              <a:t>11 самостоятелни страници</a:t>
             </a:r>
           </a:p>
           <a:p>
             <a:pPr>
               <a:spcBef>
-                <a:spcPts val="1000"/>
+                <a:spcPts val="600"/>
               </a:spcBef>
-            </a:pPr>
-            <a:r>
-              <a:rPr b="1" sz="1400">
-                <a:solidFill>
-                  <a:srgbClr val="1E293B"/>
-                </a:solidFill>
-              </a:rPr>
-              <a:t>11 работещи страници: </a:t>
-            </a:r>
-            <a:r>
-              <a:rPr sz="1400">
+              <a:defRPr sz="1300">
                 <a:solidFill>
                   <a:srgbClr val="475569"/>
                 </a:solidFill>
-              </a:rPr>
-              <a:t>Начало, Каталог услуги, 4 авторски сервизни страници (ABS, ECU, Табла, Автодиагностика), Скриптов въпросник, За нас, Контакти, 2 правни страници.</a:t>
+              </a:defRPr>
+            </a:pPr>
+            <a:r>
+              <a:t>Начало, пълен каталог с услуги, 4 авторски технически страници, скриптов съветник, За нас, Контакти и 2 легални документа.</a:t>
+            </a:r>
+          </a:p>
+        </p:txBody>
+      </p:sp>
+      <p:sp>
+        <p:nvSpPr>
+          <p:cNvPr id="8" name="Rounded Rectangle 7"/>
+          <p:cNvSpPr/>
+          <p:nvPr/>
+        </p:nvSpPr>
+        <p:spPr>
+          <a:xfrm>
+            <a:off x="731520" y="3931920"/>
+            <a:ext cx="5120640" cy="2103120"/>
+          </a:xfrm>
+          <a:prstGeom prst="roundRect">
+            <a:avLst/>
+          </a:prstGeom>
+          <a:solidFill>
+            <a:srgbClr val="FFFFFF"/>
+          </a:solidFill>
+          <a:ln w="19050">
+            <a:solidFill>
+              <a:srgbClr val="E2E8F0"/>
+            </a:solidFill>
+          </a:ln>
+        </p:spPr>
+        <p:style>
+          <a:lnRef idx="1">
+            <a:schemeClr val="accent1"/>
+          </a:lnRef>
+          <a:fillRef idx="3">
+            <a:schemeClr val="accent1"/>
+          </a:fillRef>
+          <a:effectRef idx="2">
+            <a:schemeClr val="accent1"/>
+          </a:effectRef>
+          <a:fontRef idx="minor">
+            <a:schemeClr val="lt1"/>
+          </a:fontRef>
+        </p:style>
+        <p:txBody>
+          <a:bodyPr rtlCol="0" anchor="ctr" wrap="square" lIns="228600" tIns="182880" rIns="228600" bIns="182880"/>
+          <a:lstStyle/>
+          <a:p>
+            <a:pPr algn="ctr">
+              <a:defRPr b="1" sz="1500">
+                <a:solidFill>
+                  <a:srgbClr val="1E3A8A"/>
+                </a:solidFill>
+              </a:defRPr>
+            </a:pPr>
+            <a:r>
+              <a:t>Богато експертно съдържание</a:t>
             </a:r>
           </a:p>
           <a:p>
             <a:pPr>
               <a:spcBef>
-                <a:spcPts val="1000"/>
+                <a:spcPts val="600"/>
               </a:spcBef>
-            </a:pPr>
-            <a:r>
-              <a:rPr b="1" sz="1400">
-                <a:solidFill>
-                  <a:srgbClr val="1E293B"/>
-                </a:solidFill>
-              </a:rPr>
-              <a:t>Реално съдържание: </a:t>
-            </a:r>
-            <a:r>
-              <a:rPr sz="1400">
+              <a:defRPr sz="1300">
                 <a:solidFill>
                   <a:srgbClr val="475569"/>
                 </a:solidFill>
-              </a:rPr>
-              <a:t>Над 5000 думи авторски експертен текст, богат набор от OBD-II грешки и сервизни ръководства на чист български език.</a:t>
+              </a:defRPr>
+            </a:pPr>
+            <a:r>
+              <a:t>Над 5000 думи авторски текст на български език с реални сервизни протоколи, симптоми и таблици с кодове за грешка.</a:t>
+            </a:r>
+          </a:p>
+        </p:txBody>
+      </p:sp>
+      <p:sp>
+        <p:nvSpPr>
+          <p:cNvPr id="9" name="Rounded Rectangle 8"/>
+          <p:cNvSpPr/>
+          <p:nvPr/>
+        </p:nvSpPr>
+        <p:spPr>
+          <a:xfrm>
+            <a:off x="6309360" y="3931920"/>
+            <a:ext cx="5120640" cy="2103120"/>
+          </a:xfrm>
+          <a:prstGeom prst="roundRect">
+            <a:avLst/>
+          </a:prstGeom>
+          <a:solidFill>
+            <a:srgbClr val="FFFFFF"/>
+          </a:solidFill>
+          <a:ln w="19050">
+            <a:solidFill>
+              <a:srgbClr val="E2E8F0"/>
+            </a:solidFill>
+          </a:ln>
+        </p:spPr>
+        <p:style>
+          <a:lnRef idx="1">
+            <a:schemeClr val="accent1"/>
+          </a:lnRef>
+          <a:fillRef idx="3">
+            <a:schemeClr val="accent1"/>
+          </a:fillRef>
+          <a:effectRef idx="2">
+            <a:schemeClr val="accent1"/>
+          </a:effectRef>
+          <a:fontRef idx="minor">
+            <a:schemeClr val="lt1"/>
+          </a:fontRef>
+        </p:style>
+        <p:txBody>
+          <a:bodyPr rtlCol="0" anchor="ctr" wrap="square" lIns="228600" tIns="182880" rIns="228600" bIns="182880"/>
+          <a:lstStyle/>
+          <a:p>
+            <a:pPr algn="ctr">
+              <a:defRPr b="1" sz="1500">
+                <a:solidFill>
+                  <a:srgbClr val="1E3A8A"/>
+                </a:solidFill>
+              </a:defRPr>
+            </a:pPr>
+            <a:r>
+              <a:t>Академично покритие</a:t>
             </a:r>
           </a:p>
           <a:p>
             <a:pPr>
               <a:spcBef>
-                <a:spcPts val="1000"/>
+                <a:spcPts val="600"/>
               </a:spcBef>
-            </a:pPr>
-            <a:r>
-              <a:rPr b="1" sz="1400">
-                <a:solidFill>
-                  <a:srgbClr val="1E293B"/>
-                </a:solidFill>
-              </a:rPr>
-              <a:t>Академично покритие: </a:t>
-            </a:r>
-            <a:r>
-              <a:rPr sz="1400">
+              <a:defRPr sz="1300">
                 <a:solidFill>
                   <a:srgbClr val="475569"/>
                 </a:solidFill>
-              </a:rPr>
-              <a:t>100% покриване на всички 30 университетски изисквания от конспекта на дисциплината.</a:t>
+              </a:defRPr>
+            </a:pPr>
+            <a:r>
+              <a:t>Всички предвидени практически точки по учебния конспект на дисциплината са спазени и проверени.</a:t>
             </a:r>
           </a:p>
         </p:txBody>
@@ -3540,14 +4251,100 @@
       <p:grpSpPr/>
       <p:sp>
         <p:nvSpPr>
-          <p:cNvPr id="2" name="TextBox 1"/>
+          <p:cNvPr id="2" name="Rectangle 1"/>
+          <p:cNvSpPr/>
+          <p:nvPr/>
+        </p:nvSpPr>
+        <p:spPr>
+          <a:xfrm>
+            <a:off x="0" y="0"/>
+            <a:ext cx="12191695" cy="6858000"/>
+          </a:xfrm>
+          <a:prstGeom prst="rect">
+            <a:avLst/>
+          </a:prstGeom>
+          <a:solidFill>
+            <a:srgbClr val="F8FAFC"/>
+          </a:solidFill>
+          <a:ln>
+            <a:noFill/>
+          </a:ln>
+        </p:spPr>
+        <p:style>
+          <a:lnRef idx="1">
+            <a:schemeClr val="accent1"/>
+          </a:lnRef>
+          <a:fillRef idx="3">
+            <a:schemeClr val="accent1"/>
+          </a:fillRef>
+          <a:effectRef idx="2">
+            <a:schemeClr val="accent1"/>
+          </a:effectRef>
+          <a:fontRef idx="minor">
+            <a:schemeClr val="lt1"/>
+          </a:fontRef>
+        </p:style>
+        <p:txBody>
+          <a:bodyPr rtlCol="0" anchor="ctr"/>
+          <a:lstStyle/>
+          <a:p>
+            <a:pPr algn="ctr"/>
+          </a:p>
+        </p:txBody>
+      </p:sp>
+      <p:sp>
+        <p:nvSpPr>
+          <p:cNvPr id="3" name="Rectangle 2"/>
+          <p:cNvSpPr/>
+          <p:nvPr/>
+        </p:nvSpPr>
+        <p:spPr>
+          <a:xfrm>
+            <a:off x="0" y="0"/>
+            <a:ext cx="12191695" cy="109728"/>
+          </a:xfrm>
+          <a:prstGeom prst="rect">
+            <a:avLst/>
+          </a:prstGeom>
+          <a:solidFill>
+            <a:srgbClr val="0284C7"/>
+          </a:solidFill>
+          <a:ln>
+            <a:noFill/>
+          </a:ln>
+        </p:spPr>
+        <p:style>
+          <a:lnRef idx="1">
+            <a:schemeClr val="accent1"/>
+          </a:lnRef>
+          <a:fillRef idx="3">
+            <a:schemeClr val="accent1"/>
+          </a:fillRef>
+          <a:effectRef idx="2">
+            <a:schemeClr val="accent1"/>
+          </a:effectRef>
+          <a:fontRef idx="minor">
+            <a:schemeClr val="lt1"/>
+          </a:fontRef>
+        </p:style>
+        <p:txBody>
+          <a:bodyPr rtlCol="0" anchor="ctr"/>
+          <a:lstStyle/>
+          <a:p>
+            <a:pPr algn="ctr"/>
+          </a:p>
+        </p:txBody>
+      </p:sp>
+      <p:sp>
+        <p:nvSpPr>
+          <p:cNvPr id="4" name="TextBox 3"/>
           <p:cNvSpPr txBox="1"/>
           <p:nvPr/>
         </p:nvSpPr>
         <p:spPr>
           <a:xfrm>
-            <a:off x="731520" y="457200"/>
-            <a:ext cx="7680960" cy="1097280"/>
+            <a:off x="731520" y="365760"/>
+            <a:ext cx="10698480" cy="1005840"/>
           </a:xfrm>
           <a:prstGeom prst="rect">
             <a:avLst/>
@@ -3555,7 +4352,7 @@
           <a:noFill/>
         </p:spPr>
         <p:txBody>
-          <a:bodyPr wrap="square">
+          <a:bodyPr wrap="square" lIns="0" tIns="0" rIns="0" bIns="0">
             <a:spAutoFit/>
           </a:bodyPr>
           <a:lstStyle/>
@@ -3563,38 +4360,41 @@
             <a:pPr>
               <a:defRPr sz="1100" b="1">
                 <a:solidFill>
-                  <a:srgbClr val="2563EB"/>
-                </a:solidFill>
-              </a:defRPr>
-            </a:pPr>
-            <a:r>
-              <a:t>CSCB700 - ОПТИМИЗАЦИЯ ЗА ТЪРСАЧКИ В УЕБ</a:t>
-            </a:r>
-          </a:p>
-          <a:p>
-            <a:pPr>
+                  <a:srgbClr val="0284C7"/>
+                </a:solidFill>
+              </a:defRPr>
+            </a:pPr>
+            <a:r>
+              <a:t>CSCB700 • ОПТИМИЗАЦИЯ ЗА ТЪРСАЧКИ В УЕБ</a:t>
+            </a:r>
+          </a:p>
+          <a:p>
+            <a:pPr>
+              <a:spcBef>
+                <a:spcPts val="400"/>
+              </a:spcBef>
               <a:defRPr sz="2200" b="1">
                 <a:solidFill>
-                  <a:srgbClr val="0F172A"/>
-                </a:solidFill>
-              </a:defRPr>
-            </a:pPr>
-            <a:r>
-              <a:t>2. Скриптова страница: Интерактивен съветник (Изискване #1)</a:t>
-            </a:r>
-          </a:p>
-        </p:txBody>
-      </p:sp>
-      <p:sp>
-        <p:nvSpPr>
-          <p:cNvPr id="3" name="TextBox 2"/>
+                  <a:srgbClr val="1E3A8A"/>
+                </a:solidFill>
+              </a:defRPr>
+            </a:pPr>
+            <a:r>
+              <a:t>Скриптов интерактивен съветник за диагностика</a:t>
+            </a:r>
+          </a:p>
+        </p:txBody>
+      </p:sp>
+      <p:sp>
+        <p:nvSpPr>
+          <p:cNvPr id="5" name="TextBox 4"/>
           <p:cNvSpPr txBox="1"/>
           <p:nvPr/>
         </p:nvSpPr>
         <p:spPr>
           <a:xfrm>
-            <a:off x="731520" y="1645920"/>
-            <a:ext cx="7680960" cy="4389120"/>
+            <a:off x="731520" y="6309360"/>
+            <a:ext cx="10698480" cy="365760"/>
           </a:xfrm>
           <a:prstGeom prst="rect">
             <a:avLst/>
@@ -3602,95 +4402,317 @@
           <a:noFill/>
         </p:spPr>
         <p:txBody>
-          <a:bodyPr wrap="square">
+          <a:bodyPr wrap="none" lIns="0" tIns="0" rIns="0" bIns="0">
             <a:spAutoFit/>
           </a:bodyPr>
           <a:lstStyle/>
           <a:p>
-            <a:r>
-              <a:rPr b="1" sz="1400">
-                <a:solidFill>
-                  <a:srgbClr val="1E293B"/>
-                </a:solidFill>
-              </a:rPr>
-              <a:t>URL адрес: </a:t>
-            </a:r>
-            <a:r>
-              <a:rPr sz="1400">
+            <a:pPr>
+              <a:defRPr sz="1000">
+                <a:solidFill>
+                  <a:srgbClr val="94A3B8"/>
+                </a:solidFill>
+              </a:defRPr>
+            </a:pPr>
+            <a:r>
+              <a:t>AutoElektronik — Лабораторен сервиз за автоелектроника | Преподавател: Елисавета Тричкова-Кашъмова</a:t>
+            </a:r>
+          </a:p>
+        </p:txBody>
+      </p:sp>
+      <p:sp>
+        <p:nvSpPr>
+          <p:cNvPr id="6" name="Rounded Rectangle 5"/>
+          <p:cNvSpPr/>
+          <p:nvPr/>
+        </p:nvSpPr>
+        <p:spPr>
+          <a:xfrm>
+            <a:off x="731520" y="1554480"/>
+            <a:ext cx="3291840" cy="4297680"/>
+          </a:xfrm>
+          <a:prstGeom prst="roundRect">
+            <a:avLst/>
+          </a:prstGeom>
+          <a:solidFill>
+            <a:srgbClr val="FFFFFF"/>
+          </a:solidFill>
+          <a:ln w="19050">
+            <a:solidFill>
+              <a:srgbClr val="E2E8F0"/>
+            </a:solidFill>
+          </a:ln>
+        </p:spPr>
+        <p:style>
+          <a:lnRef idx="1">
+            <a:schemeClr val="accent1"/>
+          </a:lnRef>
+          <a:fillRef idx="3">
+            <a:schemeClr val="accent1"/>
+          </a:fillRef>
+          <a:effectRef idx="2">
+            <a:schemeClr val="accent1"/>
+          </a:effectRef>
+          <a:fontRef idx="minor">
+            <a:schemeClr val="lt1"/>
+          </a:fontRef>
+        </p:style>
+        <p:txBody>
+          <a:bodyPr rtlCol="0" anchor="ctr" wrap="square" lIns="228600" tIns="228600" rIns="228600" bIns="228600"/>
+          <a:lstStyle/>
+          <a:p>
+            <a:pPr algn="ctr">
+              <a:defRPr b="1" sz="1600">
+                <a:solidFill>
+                  <a:srgbClr val="1E3A8A"/>
+                </a:solidFill>
+              </a:defRPr>
+            </a:pPr>
+            <a:r>
+              <a:t>Интерактивен въпросник</a:t>
+            </a:r>
+          </a:p>
+          <a:p>
+            <a:pPr>
+              <a:spcBef>
+                <a:spcPts val="800"/>
+              </a:spcBef>
+              <a:defRPr sz="1200">
                 <a:solidFill>
                   <a:srgbClr val="475569"/>
                 </a:solidFill>
-              </a:rPr>
-              <a:t>https://autoelektronik-service.bg/otkrii-problema/</a:t>
+              </a:defRPr>
+            </a:pPr>
+            <a:r>
+              <a:t>• Достъпен на адрес: /otkrii-problema/</a:t>
             </a:r>
           </a:p>
           <a:p>
             <a:pPr>
               <a:spcBef>
-                <a:spcPts val="1000"/>
+                <a:spcPts val="800"/>
               </a:spcBef>
-            </a:pPr>
-            <a:r>
-              <a:rPr b="1" sz="1400">
-                <a:solidFill>
-                  <a:srgbClr val="1E293B"/>
-                </a:solidFill>
-              </a:rPr>
-              <a:t>Функционалност: </a:t>
-            </a:r>
-            <a:r>
-              <a:rPr sz="1400">
+              <a:defRPr sz="1200">
                 <a:solidFill>
                   <a:srgbClr val="475569"/>
                 </a:solidFill>
-              </a:rPr>
-              <a:t>Потребителят избира симптоми (напр. 'светят ABS и ESP', 'колата гасне в движение', 'не работят стрелките на таблото').</a:t>
+              </a:defRPr>
+            </a:pPr>
+            <a:r>
+              <a:t>• Позволява бърз избор на симптоми (спирачна система, двигател, табло)</a:t>
             </a:r>
           </a:p>
           <a:p>
             <a:pPr>
               <a:spcBef>
-                <a:spcPts val="1000"/>
+                <a:spcPts val="800"/>
               </a:spcBef>
-            </a:pPr>
-            <a:r>
-              <a:rPr b="1" sz="1400">
-                <a:solidFill>
-                  <a:srgbClr val="1E293B"/>
-                </a:solidFill>
-              </a:rPr>
-              <a:t>Търсене по кодове: </a:t>
-            </a:r>
-            <a:r>
-              <a:rPr sz="1400">
+              <a:defRPr sz="1200">
                 <a:solidFill>
                   <a:srgbClr val="475569"/>
                 </a:solidFill>
-              </a:rPr>
-              <a:t>Вградена интерактивна база с 16 реални OBD грешки (5DF0, 5DF5, 01435, P0606, P0300 и др.).</a:t>
+              </a:defRPr>
+            </a:pPr>
+            <a:r>
+              <a:t>• Подпомага потребителя да разбере естеството на проблема</a:t>
+            </a:r>
+          </a:p>
+        </p:txBody>
+      </p:sp>
+      <p:sp>
+        <p:nvSpPr>
+          <p:cNvPr id="7" name="Rounded Rectangle 6"/>
+          <p:cNvSpPr/>
+          <p:nvPr/>
+        </p:nvSpPr>
+        <p:spPr>
+          <a:xfrm>
+            <a:off x="4389120" y="1554480"/>
+            <a:ext cx="3291840" cy="4297680"/>
+          </a:xfrm>
+          <a:prstGeom prst="roundRect">
+            <a:avLst/>
+          </a:prstGeom>
+          <a:solidFill>
+            <a:srgbClr val="FFFFFF"/>
+          </a:solidFill>
+          <a:ln w="19050">
+            <a:solidFill>
+              <a:srgbClr val="E2E8F0"/>
+            </a:solidFill>
+          </a:ln>
+        </p:spPr>
+        <p:style>
+          <a:lnRef idx="1">
+            <a:schemeClr val="accent1"/>
+          </a:lnRef>
+          <a:fillRef idx="3">
+            <a:schemeClr val="accent1"/>
+          </a:fillRef>
+          <a:effectRef idx="2">
+            <a:schemeClr val="accent1"/>
+          </a:effectRef>
+          <a:fontRef idx="minor">
+            <a:schemeClr val="lt1"/>
+          </a:fontRef>
+        </p:style>
+        <p:txBody>
+          <a:bodyPr rtlCol="0" anchor="ctr" wrap="square" lIns="228600" tIns="228600" rIns="228600" bIns="228600"/>
+          <a:lstStyle/>
+          <a:p>
+            <a:pPr algn="ctr">
+              <a:defRPr b="1" sz="1600">
+                <a:solidFill>
+                  <a:srgbClr val="1E3A8A"/>
+                </a:solidFill>
+              </a:defRPr>
+            </a:pPr>
+            <a:r>
+              <a:t>База данни с 16 OBD грешки</a:t>
             </a:r>
           </a:p>
           <a:p>
             <a:pPr>
               <a:spcBef>
-                <a:spcPts val="1000"/>
+                <a:spcPts val="800"/>
               </a:spcBef>
-            </a:pPr>
-            <a:r>
-              <a:rPr b="1" sz="1400">
-                <a:solidFill>
-                  <a:srgbClr val="1E293B"/>
-                </a:solidFill>
-              </a:rPr>
-              <a:t>Калкулатор и CTA: </a:t>
-            </a:r>
-            <a:r>
-              <a:rPr sz="1400">
+              <a:defRPr sz="1200">
                 <a:solidFill>
                   <a:srgbClr val="475569"/>
                 </a:solidFill>
-              </a:rPr>
-              <a:t>Скриптът динамично показва вероятния повреден блок, очакваната цена на ремонт и бутон за директна връзка със сервиза.</a:t>
+              </a:defRPr>
+            </a:pPr>
+            <a:r>
+              <a:t>• Включени са най-често срещаните дефекти: 5DF0, 5DF5, 01435, P0606, P0300</a:t>
+            </a:r>
+          </a:p>
+          <a:p>
+            <a:pPr>
+              <a:spcBef>
+                <a:spcPts val="800"/>
+              </a:spcBef>
+              <a:defRPr sz="1200">
+                <a:solidFill>
+                  <a:srgbClr val="475569"/>
+                </a:solidFill>
+              </a:defRPr>
+            </a:pPr>
+            <a:r>
+              <a:t>• Моментално филтриране и разпознаване на грешката</a:t>
+            </a:r>
+          </a:p>
+          <a:p>
+            <a:pPr>
+              <a:spcBef>
+                <a:spcPts val="800"/>
+              </a:spcBef>
+              <a:defRPr sz="1200">
+                <a:solidFill>
+                  <a:srgbClr val="475569"/>
+                </a:solidFill>
+              </a:defRPr>
+            </a:pPr>
+            <a:r>
+              <a:t>• Индикация за засегнатия електронен модул</a:t>
+            </a:r>
+          </a:p>
+        </p:txBody>
+      </p:sp>
+      <p:sp>
+        <p:nvSpPr>
+          <p:cNvPr id="8" name="Rounded Rectangle 7"/>
+          <p:cNvSpPr/>
+          <p:nvPr/>
+        </p:nvSpPr>
+        <p:spPr>
+          <a:xfrm>
+            <a:off x="8046720" y="1554480"/>
+            <a:ext cx="3291840" cy="4297680"/>
+          </a:xfrm>
+          <a:prstGeom prst="roundRect">
+            <a:avLst/>
+          </a:prstGeom>
+          <a:solidFill>
+            <a:srgbClr val="FFFFFF"/>
+          </a:solidFill>
+          <a:ln w="19050">
+            <a:solidFill>
+              <a:srgbClr val="E2E8F0"/>
+            </a:solidFill>
+          </a:ln>
+        </p:spPr>
+        <p:style>
+          <a:lnRef idx="1">
+            <a:schemeClr val="accent1"/>
+          </a:lnRef>
+          <a:fillRef idx="3">
+            <a:schemeClr val="accent1"/>
+          </a:fillRef>
+          <a:effectRef idx="2">
+            <a:schemeClr val="accent1"/>
+          </a:effectRef>
+          <a:fontRef idx="minor">
+            <a:schemeClr val="lt1"/>
+          </a:fontRef>
+        </p:style>
+        <p:txBody>
+          <a:bodyPr rtlCol="0" anchor="ctr" wrap="square" lIns="228600" tIns="228600" rIns="228600" bIns="228600"/>
+          <a:lstStyle/>
+          <a:p>
+            <a:pPr algn="ctr">
+              <a:defRPr b="1" sz="1600">
+                <a:solidFill>
+                  <a:srgbClr val="1E3A8A"/>
+                </a:solidFill>
+              </a:defRPr>
+            </a:pPr>
+            <a:r>
+              <a:t>Калкулатор и директна връзка</a:t>
+            </a:r>
+          </a:p>
+          <a:p>
+            <a:pPr>
+              <a:spcBef>
+                <a:spcPts val="800"/>
+              </a:spcBef>
+              <a:defRPr sz="1200">
+                <a:solidFill>
+                  <a:srgbClr val="475569"/>
+                </a:solidFill>
+              </a:defRPr>
+            </a:pPr>
+            <a:r>
+              <a:t>• Показване на ориентировъчна цена за лабораторен ремонт</a:t>
+            </a:r>
+          </a:p>
+          <a:p>
+            <a:pPr>
+              <a:spcBef>
+                <a:spcPts val="800"/>
+              </a:spcBef>
+              <a:defRPr sz="1200">
+                <a:solidFill>
+                  <a:srgbClr val="475569"/>
+                </a:solidFill>
+              </a:defRPr>
+            </a:pPr>
+            <a:r>
+              <a:t>• Бутон за запазване на час и изпращане на заявка</a:t>
+            </a:r>
+          </a:p>
+          <a:p>
+            <a:pPr>
+              <a:spcBef>
+                <a:spcPts val="800"/>
+              </a:spcBef>
+              <a:defRPr sz="1200">
+                <a:solidFill>
+                  <a:srgbClr val="475569"/>
+                </a:solidFill>
+              </a:defRPr>
+            </a:pPr>
+            <a:r>
+              <a:t>• Значително повишаване на ангажираността и времето на сайта</a:t>
             </a:r>
           </a:p>
         </p:txBody>
@@ -3715,14 +4737,100 @@
       <p:grpSpPr/>
       <p:sp>
         <p:nvSpPr>
-          <p:cNvPr id="2" name="TextBox 1"/>
+          <p:cNvPr id="2" name="Rectangle 1"/>
+          <p:cNvSpPr/>
+          <p:nvPr/>
+        </p:nvSpPr>
+        <p:spPr>
+          <a:xfrm>
+            <a:off x="0" y="0"/>
+            <a:ext cx="12191695" cy="6858000"/>
+          </a:xfrm>
+          <a:prstGeom prst="rect">
+            <a:avLst/>
+          </a:prstGeom>
+          <a:solidFill>
+            <a:srgbClr val="F8FAFC"/>
+          </a:solidFill>
+          <a:ln>
+            <a:noFill/>
+          </a:ln>
+        </p:spPr>
+        <p:style>
+          <a:lnRef idx="1">
+            <a:schemeClr val="accent1"/>
+          </a:lnRef>
+          <a:fillRef idx="3">
+            <a:schemeClr val="accent1"/>
+          </a:fillRef>
+          <a:effectRef idx="2">
+            <a:schemeClr val="accent1"/>
+          </a:effectRef>
+          <a:fontRef idx="minor">
+            <a:schemeClr val="lt1"/>
+          </a:fontRef>
+        </p:style>
+        <p:txBody>
+          <a:bodyPr rtlCol="0" anchor="ctr"/>
+          <a:lstStyle/>
+          <a:p>
+            <a:pPr algn="ctr"/>
+          </a:p>
+        </p:txBody>
+      </p:sp>
+      <p:sp>
+        <p:nvSpPr>
+          <p:cNvPr id="3" name="Rectangle 2"/>
+          <p:cNvSpPr/>
+          <p:nvPr/>
+        </p:nvSpPr>
+        <p:spPr>
+          <a:xfrm>
+            <a:off x="0" y="0"/>
+            <a:ext cx="12191695" cy="109728"/>
+          </a:xfrm>
+          <a:prstGeom prst="rect">
+            <a:avLst/>
+          </a:prstGeom>
+          <a:solidFill>
+            <a:srgbClr val="0284C7"/>
+          </a:solidFill>
+          <a:ln>
+            <a:noFill/>
+          </a:ln>
+        </p:spPr>
+        <p:style>
+          <a:lnRef idx="1">
+            <a:schemeClr val="accent1"/>
+          </a:lnRef>
+          <a:fillRef idx="3">
+            <a:schemeClr val="accent1"/>
+          </a:fillRef>
+          <a:effectRef idx="2">
+            <a:schemeClr val="accent1"/>
+          </a:effectRef>
+          <a:fontRef idx="minor">
+            <a:schemeClr val="lt1"/>
+          </a:fontRef>
+        </p:style>
+        <p:txBody>
+          <a:bodyPr rtlCol="0" anchor="ctr"/>
+          <a:lstStyle/>
+          <a:p>
+            <a:pPr algn="ctr"/>
+          </a:p>
+        </p:txBody>
+      </p:sp>
+      <p:sp>
+        <p:nvSpPr>
+          <p:cNvPr id="4" name="TextBox 3"/>
           <p:cNvSpPr txBox="1"/>
           <p:nvPr/>
         </p:nvSpPr>
         <p:spPr>
           <a:xfrm>
-            <a:off x="731520" y="457200"/>
-            <a:ext cx="7680960" cy="1097280"/>
+            <a:off x="731520" y="365760"/>
+            <a:ext cx="10698480" cy="1005840"/>
           </a:xfrm>
           <a:prstGeom prst="rect">
             <a:avLst/>
@@ -3730,7 +4838,7 @@
           <a:noFill/>
         </p:spPr>
         <p:txBody>
-          <a:bodyPr wrap="square">
+          <a:bodyPr wrap="square" lIns="0" tIns="0" rIns="0" bIns="0">
             <a:spAutoFit/>
           </a:bodyPr>
           <a:lstStyle/>
@@ -3738,38 +4846,41 @@
             <a:pPr>
               <a:defRPr sz="1100" b="1">
                 <a:solidFill>
-                  <a:srgbClr val="2563EB"/>
-                </a:solidFill>
-              </a:defRPr>
-            </a:pPr>
-            <a:r>
-              <a:t>CSCB700 - ОПТИМИЗАЦИЯ ЗА ТЪРСАЧКИ В УЕБ</a:t>
-            </a:r>
-          </a:p>
-          <a:p>
-            <a:pPr>
+                  <a:srgbClr val="0284C7"/>
+                </a:solidFill>
+              </a:defRPr>
+            </a:pPr>
+            <a:r>
+              <a:t>CSCB700 • ОПТИМИЗАЦИЯ ЗА ТЪРСАЧКИ В УЕБ</a:t>
+            </a:r>
+          </a:p>
+          <a:p>
+            <a:pPr>
+              <a:spcBef>
+                <a:spcPts val="400"/>
+              </a:spcBef>
               <a:defRPr sz="2200" b="1">
                 <a:solidFill>
-                  <a:srgbClr val="0F172A"/>
-                </a:solidFill>
-              </a:defRPr>
-            </a:pPr>
-            <a:r>
-              <a:t>3. Он-пейдж оптимизация и семантика (Изисквания #2, #10-13, #21)</a:t>
-            </a:r>
-          </a:p>
-        </p:txBody>
-      </p:sp>
-      <p:sp>
-        <p:nvSpPr>
-          <p:cNvPr id="3" name="TextBox 2"/>
+                  <a:srgbClr val="1E3A8A"/>
+                </a:solidFill>
+              </a:defRPr>
+            </a:pPr>
+            <a:r>
+              <a:t>Он-пейдж оптимизация и семантична структура</a:t>
+            </a:r>
+          </a:p>
+        </p:txBody>
+      </p:sp>
+      <p:sp>
+        <p:nvSpPr>
+          <p:cNvPr id="5" name="TextBox 4"/>
           <p:cNvSpPr txBox="1"/>
           <p:nvPr/>
         </p:nvSpPr>
         <p:spPr>
           <a:xfrm>
-            <a:off x="731520" y="1645920"/>
-            <a:ext cx="7680960" cy="4389120"/>
+            <a:off x="731520" y="6309360"/>
+            <a:ext cx="10698480" cy="365760"/>
           </a:xfrm>
           <a:prstGeom prst="rect">
             <a:avLst/>
@@ -3777,95 +4888,296 @@
           <a:noFill/>
         </p:spPr>
         <p:txBody>
-          <a:bodyPr wrap="square">
+          <a:bodyPr wrap="none" lIns="0" tIns="0" rIns="0" bIns="0">
             <a:spAutoFit/>
           </a:bodyPr>
           <a:lstStyle/>
           <a:p>
-            <a:r>
-              <a:rPr b="1" sz="1400">
-                <a:solidFill>
-                  <a:srgbClr val="1E293B"/>
-                </a:solidFill>
-              </a:rPr>
-              <a:t>W3C валидност (#2): </a:t>
-            </a:r>
-            <a:r>
-              <a:rPr sz="1400">
+            <a:pPr>
+              <a:defRPr sz="1000">
+                <a:solidFill>
+                  <a:srgbClr val="94A3B8"/>
+                </a:solidFill>
+              </a:defRPr>
+            </a:pPr>
+            <a:r>
+              <a:t>AutoElektronik — Лабораторен сервиз за автоелектроника | Преподавател: Елисавета Тричкова-Кашъмова</a:t>
+            </a:r>
+          </a:p>
+        </p:txBody>
+      </p:sp>
+      <p:sp>
+        <p:nvSpPr>
+          <p:cNvPr id="6" name="Rounded Rectangle 5"/>
+          <p:cNvSpPr/>
+          <p:nvPr/>
+        </p:nvSpPr>
+        <p:spPr>
+          <a:xfrm>
+            <a:off x="731520" y="1554480"/>
+            <a:ext cx="5120640" cy="2103120"/>
+          </a:xfrm>
+          <a:prstGeom prst="roundRect">
+            <a:avLst/>
+          </a:prstGeom>
+          <a:solidFill>
+            <a:srgbClr val="FFFFFF"/>
+          </a:solidFill>
+          <a:ln w="19050">
+            <a:solidFill>
+              <a:srgbClr val="E2E8F0"/>
+            </a:solidFill>
+          </a:ln>
+        </p:spPr>
+        <p:style>
+          <a:lnRef idx="1">
+            <a:schemeClr val="accent1"/>
+          </a:lnRef>
+          <a:fillRef idx="3">
+            <a:schemeClr val="accent1"/>
+          </a:fillRef>
+          <a:effectRef idx="2">
+            <a:schemeClr val="accent1"/>
+          </a:effectRef>
+          <a:fontRef idx="minor">
+            <a:schemeClr val="lt1"/>
+          </a:fontRef>
+        </p:style>
+        <p:txBody>
+          <a:bodyPr rtlCol="0" anchor="ctr" wrap="square" lIns="228600" tIns="182880" rIns="228600" bIns="182880"/>
+          <a:lstStyle/>
+          <a:p>
+            <a:pPr algn="ctr">
+              <a:defRPr b="1" sz="1500">
+                <a:solidFill>
+                  <a:srgbClr val="1E3A8A"/>
+                </a:solidFill>
+              </a:defRPr>
+            </a:pPr>
+            <a:r>
+              <a:t>Валиден HTML5 стандарт</a:t>
+            </a:r>
+          </a:p>
+          <a:p>
+            <a:pPr>
+              <a:spcBef>
+                <a:spcPts val="600"/>
+              </a:spcBef>
+              <a:defRPr sz="1300">
                 <a:solidFill>
                   <a:srgbClr val="475569"/>
                 </a:solidFill>
-              </a:rPr>
-              <a:t>Всички страници преминават официалната проверка на W3C с точно 0 грешки и 0 предупреждения.</a:t>
+              </a:defRPr>
+            </a:pPr>
+            <a:r>
+              <a:t>Всички страници преминават официалния W3C валидатор с точно 0 грешки и 0 предупреждения.</a:t>
+            </a:r>
+          </a:p>
+        </p:txBody>
+      </p:sp>
+      <p:sp>
+        <p:nvSpPr>
+          <p:cNvPr id="7" name="Rounded Rectangle 6"/>
+          <p:cNvSpPr/>
+          <p:nvPr/>
+        </p:nvSpPr>
+        <p:spPr>
+          <a:xfrm>
+            <a:off x="6309360" y="1554480"/>
+            <a:ext cx="5120640" cy="2103120"/>
+          </a:xfrm>
+          <a:prstGeom prst="roundRect">
+            <a:avLst/>
+          </a:prstGeom>
+          <a:solidFill>
+            <a:srgbClr val="FFFFFF"/>
+          </a:solidFill>
+          <a:ln w="19050">
+            <a:solidFill>
+              <a:srgbClr val="E2E8F0"/>
+            </a:solidFill>
+          </a:ln>
+        </p:spPr>
+        <p:style>
+          <a:lnRef idx="1">
+            <a:schemeClr val="accent1"/>
+          </a:lnRef>
+          <a:fillRef idx="3">
+            <a:schemeClr val="accent1"/>
+          </a:fillRef>
+          <a:effectRef idx="2">
+            <a:schemeClr val="accent1"/>
+          </a:effectRef>
+          <a:fontRef idx="minor">
+            <a:schemeClr val="lt1"/>
+          </a:fontRef>
+        </p:style>
+        <p:txBody>
+          <a:bodyPr rtlCol="0" anchor="ctr" wrap="square" lIns="228600" tIns="182880" rIns="228600" bIns="182880"/>
+          <a:lstStyle/>
+          <a:p>
+            <a:pPr algn="ctr">
+              <a:defRPr b="1" sz="1500">
+                <a:solidFill>
+                  <a:srgbClr val="1E3A8A"/>
+                </a:solidFill>
+              </a:defRPr>
+            </a:pPr>
+            <a:r>
+              <a:t>Метаданни и заглавия</a:t>
             </a:r>
           </a:p>
           <a:p>
             <a:pPr>
               <a:spcBef>
-                <a:spcPts val="1000"/>
+                <a:spcPts val="600"/>
               </a:spcBef>
-            </a:pPr>
-            <a:r>
-              <a:rPr b="1" sz="1400">
-                <a:solidFill>
-                  <a:srgbClr val="1E293B"/>
-                </a:solidFill>
-              </a:rPr>
-              <a:t>Атрибути на изображения (#10, #11): </a:t>
-            </a:r>
-            <a:r>
-              <a:rPr sz="1400">
+              <a:defRPr sz="1300">
                 <a:solidFill>
                   <a:srgbClr val="475569"/>
                 </a:solidFill>
-              </a:rPr>
-              <a:t>Всички 16 изображения на сайта имат точни width и height атрибути (елиминиращи CLS) и смислени alt описания.</a:t>
+              </a:defRPr>
+            </a:pPr>
+            <a:r>
+              <a:t>Всяка страница има уникално заглавие (Title до 60 знака), точно един H1 таг и уникален Meta Description (до 160 знака).</a:t>
+            </a:r>
+          </a:p>
+        </p:txBody>
+      </p:sp>
+      <p:sp>
+        <p:nvSpPr>
+          <p:cNvPr id="8" name="Rounded Rectangle 7"/>
+          <p:cNvSpPr/>
+          <p:nvPr/>
+        </p:nvSpPr>
+        <p:spPr>
+          <a:xfrm>
+            <a:off x="731520" y="3931920"/>
+            <a:ext cx="5120640" cy="2103120"/>
+          </a:xfrm>
+          <a:prstGeom prst="roundRect">
+            <a:avLst/>
+          </a:prstGeom>
+          <a:solidFill>
+            <a:srgbClr val="FFFFFF"/>
+          </a:solidFill>
+          <a:ln w="19050">
+            <a:solidFill>
+              <a:srgbClr val="E2E8F0"/>
+            </a:solidFill>
+          </a:ln>
+        </p:spPr>
+        <p:style>
+          <a:lnRef idx="1">
+            <a:schemeClr val="accent1"/>
+          </a:lnRef>
+          <a:fillRef idx="3">
+            <a:schemeClr val="accent1"/>
+          </a:fillRef>
+          <a:effectRef idx="2">
+            <a:schemeClr val="accent1"/>
+          </a:effectRef>
+          <a:fontRef idx="minor">
+            <a:schemeClr val="lt1"/>
+          </a:fontRef>
+        </p:style>
+        <p:txBody>
+          <a:bodyPr rtlCol="0" anchor="ctr" wrap="square" lIns="228600" tIns="182880" rIns="228600" bIns="182880"/>
+          <a:lstStyle/>
+          <a:p>
+            <a:pPr algn="ctr">
+              <a:defRPr b="1" sz="1500">
+                <a:solidFill>
+                  <a:srgbClr val="1E3A8A"/>
+                </a:solidFill>
+              </a:defRPr>
+            </a:pPr>
+            <a:r>
+              <a:t>Оптимизация на изображения</a:t>
             </a:r>
           </a:p>
           <a:p>
             <a:pPr>
               <a:spcBef>
-                <a:spcPts val="1000"/>
+                <a:spcPts val="600"/>
               </a:spcBef>
-            </a:pPr>
-            <a:r>
-              <a:rPr b="1" sz="1400">
-                <a:solidFill>
-                  <a:srgbClr val="1E293B"/>
-                </a:solidFill>
-              </a:rPr>
-              <a:t>Title атрибути на линкове (#12): </a:t>
-            </a:r>
-            <a:r>
-              <a:rPr sz="1400">
+              <a:defRPr sz="1300">
                 <a:solidFill>
                   <a:srgbClr val="475569"/>
                 </a:solidFill>
-              </a:rPr>
-              <a:t>Всички 333 вътрешни и външни връзки на сайта притежават описателен title атрибут.</a:t>
+              </a:defRPr>
+            </a:pPr>
+            <a:r>
+              <a:t>Всички 16 изображения имат предварително зададени атрибути width и height, както и подробни alt описания.</a:t>
+            </a:r>
+          </a:p>
+        </p:txBody>
+      </p:sp>
+      <p:sp>
+        <p:nvSpPr>
+          <p:cNvPr id="9" name="Rounded Rectangle 8"/>
+          <p:cNvSpPr/>
+          <p:nvPr/>
+        </p:nvSpPr>
+        <p:spPr>
+          <a:xfrm>
+            <a:off x="6309360" y="3931920"/>
+            <a:ext cx="5120640" cy="2103120"/>
+          </a:xfrm>
+          <a:prstGeom prst="roundRect">
+            <a:avLst/>
+          </a:prstGeom>
+          <a:solidFill>
+            <a:srgbClr val="FFFFFF"/>
+          </a:solidFill>
+          <a:ln w="19050">
+            <a:solidFill>
+              <a:srgbClr val="E2E8F0"/>
+            </a:solidFill>
+          </a:ln>
+        </p:spPr>
+        <p:style>
+          <a:lnRef idx="1">
+            <a:schemeClr val="accent1"/>
+          </a:lnRef>
+          <a:fillRef idx="3">
+            <a:schemeClr val="accent1"/>
+          </a:fillRef>
+          <a:effectRef idx="2">
+            <a:schemeClr val="accent1"/>
+          </a:effectRef>
+          <a:fontRef idx="minor">
+            <a:schemeClr val="lt1"/>
+          </a:fontRef>
+        </p:style>
+        <p:txBody>
+          <a:bodyPr rtlCol="0" anchor="ctr" wrap="square" lIns="228600" tIns="182880" rIns="228600" bIns="182880"/>
+          <a:lstStyle/>
+          <a:p>
+            <a:pPr algn="ctr">
+              <a:defRPr b="1" sz="1500">
+                <a:solidFill>
+                  <a:srgbClr val="1E3A8A"/>
+                </a:solidFill>
+              </a:defRPr>
+            </a:pPr>
+            <a:r>
+              <a:t>Атрибути на връзките</a:t>
             </a:r>
           </a:p>
           <a:p>
             <a:pPr>
               <a:spcBef>
-                <a:spcPts val="1000"/>
+                <a:spcPts val="600"/>
               </a:spcBef>
-            </a:pPr>
-            <a:r>
-              <a:rPr b="1" sz="1400">
-                <a:solidFill>
-                  <a:srgbClr val="1E293B"/>
-                </a:solidFill>
-              </a:rPr>
-              <a:t>Заглавна йерархия (#21): </a:t>
-            </a:r>
-            <a:r>
-              <a:rPr sz="1400">
+              <a:defRPr sz="1300">
                 <a:solidFill>
                   <a:srgbClr val="475569"/>
                 </a:solidFill>
-              </a:rPr>
-              <a:t>Точно един H1 таг на страница с ключовата дума, следван от подредени H2 и H3 раздели.</a:t>
+              </a:defRPr>
+            </a:pPr>
+            <a:r>
+              <a:t>Всички 333 вътрешни и външни хипервръзки в сайта притежават смислен title атрибут за по-добра достъпност.</a:t>
             </a:r>
           </a:p>
         </p:txBody>
@@ -3890,14 +5202,100 @@
       <p:grpSpPr/>
       <p:sp>
         <p:nvSpPr>
-          <p:cNvPr id="2" name="TextBox 1"/>
+          <p:cNvPr id="2" name="Rectangle 1"/>
+          <p:cNvSpPr/>
+          <p:nvPr/>
+        </p:nvSpPr>
+        <p:spPr>
+          <a:xfrm>
+            <a:off x="0" y="0"/>
+            <a:ext cx="12191695" cy="6858000"/>
+          </a:xfrm>
+          <a:prstGeom prst="rect">
+            <a:avLst/>
+          </a:prstGeom>
+          <a:solidFill>
+            <a:srgbClr val="F8FAFC"/>
+          </a:solidFill>
+          <a:ln>
+            <a:noFill/>
+          </a:ln>
+        </p:spPr>
+        <p:style>
+          <a:lnRef idx="1">
+            <a:schemeClr val="accent1"/>
+          </a:lnRef>
+          <a:fillRef idx="3">
+            <a:schemeClr val="accent1"/>
+          </a:fillRef>
+          <a:effectRef idx="2">
+            <a:schemeClr val="accent1"/>
+          </a:effectRef>
+          <a:fontRef idx="minor">
+            <a:schemeClr val="lt1"/>
+          </a:fontRef>
+        </p:style>
+        <p:txBody>
+          <a:bodyPr rtlCol="0" anchor="ctr"/>
+          <a:lstStyle/>
+          <a:p>
+            <a:pPr algn="ctr"/>
+          </a:p>
+        </p:txBody>
+      </p:sp>
+      <p:sp>
+        <p:nvSpPr>
+          <p:cNvPr id="3" name="Rectangle 2"/>
+          <p:cNvSpPr/>
+          <p:nvPr/>
+        </p:nvSpPr>
+        <p:spPr>
+          <a:xfrm>
+            <a:off x="0" y="0"/>
+            <a:ext cx="12191695" cy="109728"/>
+          </a:xfrm>
+          <a:prstGeom prst="rect">
+            <a:avLst/>
+          </a:prstGeom>
+          <a:solidFill>
+            <a:srgbClr val="0284C7"/>
+          </a:solidFill>
+          <a:ln>
+            <a:noFill/>
+          </a:ln>
+        </p:spPr>
+        <p:style>
+          <a:lnRef idx="1">
+            <a:schemeClr val="accent1"/>
+          </a:lnRef>
+          <a:fillRef idx="3">
+            <a:schemeClr val="accent1"/>
+          </a:fillRef>
+          <a:effectRef idx="2">
+            <a:schemeClr val="accent1"/>
+          </a:effectRef>
+          <a:fontRef idx="minor">
+            <a:schemeClr val="lt1"/>
+          </a:fontRef>
+        </p:style>
+        <p:txBody>
+          <a:bodyPr rtlCol="0" anchor="ctr"/>
+          <a:lstStyle/>
+          <a:p>
+            <a:pPr algn="ctr"/>
+          </a:p>
+        </p:txBody>
+      </p:sp>
+      <p:sp>
+        <p:nvSpPr>
+          <p:cNvPr id="4" name="TextBox 3"/>
           <p:cNvSpPr txBox="1"/>
           <p:nvPr/>
         </p:nvSpPr>
         <p:spPr>
           <a:xfrm>
-            <a:off x="731520" y="457200"/>
-            <a:ext cx="7680960" cy="1097280"/>
+            <a:off x="731520" y="365760"/>
+            <a:ext cx="10698480" cy="1005840"/>
           </a:xfrm>
           <a:prstGeom prst="rect">
             <a:avLst/>
@@ -3905,7 +5303,7 @@
           <a:noFill/>
         </p:spPr>
         <p:txBody>
-          <a:bodyPr wrap="square">
+          <a:bodyPr wrap="square" lIns="0" tIns="0" rIns="0" bIns="0">
             <a:spAutoFit/>
           </a:bodyPr>
           <a:lstStyle/>
@@ -3913,38 +5311,41 @@
             <a:pPr>
               <a:defRPr sz="1100" b="1">
                 <a:solidFill>
-                  <a:srgbClr val="2563EB"/>
-                </a:solidFill>
-              </a:defRPr>
-            </a:pPr>
-            <a:r>
-              <a:t>CSCB700 - ОПТИМИЗАЦИЯ ЗА ТЪРСАЧКИ В УЕБ</a:t>
-            </a:r>
-          </a:p>
-          <a:p>
-            <a:pPr>
+                  <a:srgbClr val="0284C7"/>
+                </a:solidFill>
+              </a:defRPr>
+            </a:pPr>
+            <a:r>
+              <a:t>CSCB700 • ОПТИМИЗАЦИЯ ЗА ТЪРСАЧКИ В УЕБ</a:t>
+            </a:r>
+          </a:p>
+          <a:p>
+            <a:pPr>
+              <a:spcBef>
+                <a:spcPts val="400"/>
+              </a:spcBef>
               <a:defRPr sz="2200" b="1">
                 <a:solidFill>
-                  <a:srgbClr val="0F172A"/>
-                </a:solidFill>
-              </a:defRPr>
-            </a:pPr>
-            <a:r>
-              <a:t>4. Трите специализирани XML карти на сайта (Изисквания #5a, #5b, #5c)</a:t>
-            </a:r>
-          </a:p>
-        </p:txBody>
-      </p:sp>
-      <p:sp>
-        <p:nvSpPr>
-          <p:cNvPr id="3" name="TextBox 2"/>
+                  <a:srgbClr val="1E3A8A"/>
+                </a:solidFill>
+              </a:defRPr>
+            </a:pPr>
+            <a:r>
+              <a:t>Специализирани XML карти на сайта</a:t>
+            </a:r>
+          </a:p>
+        </p:txBody>
+      </p:sp>
+      <p:sp>
+        <p:nvSpPr>
+          <p:cNvPr id="5" name="TextBox 4"/>
           <p:cNvSpPr txBox="1"/>
           <p:nvPr/>
         </p:nvSpPr>
         <p:spPr>
           <a:xfrm>
-            <a:off x="731520" y="1645920"/>
-            <a:ext cx="7680960" cy="4389120"/>
+            <a:off x="731520" y="6309360"/>
+            <a:ext cx="10698480" cy="365760"/>
           </a:xfrm>
           <a:prstGeom prst="rect">
             <a:avLst/>
@@ -3952,95 +5353,317 @@
           <a:noFill/>
         </p:spPr>
         <p:txBody>
-          <a:bodyPr wrap="square">
+          <a:bodyPr wrap="none" lIns="0" tIns="0" rIns="0" bIns="0">
             <a:spAutoFit/>
           </a:bodyPr>
           <a:lstStyle/>
           <a:p>
-            <a:r>
-              <a:rPr b="1" sz="1400">
-                <a:solidFill>
-                  <a:srgbClr val="1E293B"/>
-                </a:solidFill>
-              </a:rPr>
-              <a:t>Основна XML карта (#5a): </a:t>
-            </a:r>
-            <a:r>
-              <a:rPr sz="1400">
+            <a:pPr>
+              <a:defRPr sz="1000">
+                <a:solidFill>
+                  <a:srgbClr val="94A3B8"/>
+                </a:solidFill>
+              </a:defRPr>
+            </a:pPr>
+            <a:r>
+              <a:t>AutoElektronik — Лабораторен сервиз за автоелектроника | Преподавател: Елисавета Тричкова-Кашъмова</a:t>
+            </a:r>
+          </a:p>
+        </p:txBody>
+      </p:sp>
+      <p:sp>
+        <p:nvSpPr>
+          <p:cNvPr id="6" name="Rounded Rectangle 5"/>
+          <p:cNvSpPr/>
+          <p:nvPr/>
+        </p:nvSpPr>
+        <p:spPr>
+          <a:xfrm>
+            <a:off x="731520" y="1554480"/>
+            <a:ext cx="3291840" cy="4297680"/>
+          </a:xfrm>
+          <a:prstGeom prst="roundRect">
+            <a:avLst/>
+          </a:prstGeom>
+          <a:solidFill>
+            <a:srgbClr val="FFFFFF"/>
+          </a:solidFill>
+          <a:ln w="19050">
+            <a:solidFill>
+              <a:srgbClr val="E2E8F0"/>
+            </a:solidFill>
+          </a:ln>
+        </p:spPr>
+        <p:style>
+          <a:lnRef idx="1">
+            <a:schemeClr val="accent1"/>
+          </a:lnRef>
+          <a:fillRef idx="3">
+            <a:schemeClr val="accent1"/>
+          </a:fillRef>
+          <a:effectRef idx="2">
+            <a:schemeClr val="accent1"/>
+          </a:effectRef>
+          <a:fontRef idx="minor">
+            <a:schemeClr val="lt1"/>
+          </a:fontRef>
+        </p:style>
+        <p:txBody>
+          <a:bodyPr rtlCol="0" anchor="ctr" wrap="square" lIns="228600" tIns="228600" rIns="228600" bIns="228600"/>
+          <a:lstStyle/>
+          <a:p>
+            <a:pPr algn="ctr">
+              <a:defRPr b="1" sz="1600">
+                <a:solidFill>
+                  <a:srgbClr val="1E3A8A"/>
+                </a:solidFill>
+              </a:defRPr>
+            </a:pPr>
+            <a:r>
+              <a:t>Основна XML карта (/sitemap.xml)</a:t>
+            </a:r>
+          </a:p>
+          <a:p>
+            <a:pPr>
+              <a:spcBef>
+                <a:spcPts val="800"/>
+              </a:spcBef>
+              <a:defRPr sz="1200">
                 <a:solidFill>
                   <a:srgbClr val="475569"/>
                 </a:solidFill>
-              </a:rPr>
-              <a:t>/sitemap.xml — Индексира всички 11 канонични страници с дата на промяна, приоритет и честота на обхождане.</a:t>
+              </a:defRPr>
+            </a:pPr>
+            <a:r>
+              <a:t>• Индексира всички 11 канонични страници на сайта</a:t>
             </a:r>
           </a:p>
           <a:p>
             <a:pPr>
               <a:spcBef>
-                <a:spcPts val="1000"/>
+                <a:spcPts val="800"/>
               </a:spcBef>
-            </a:pPr>
-            <a:r>
-              <a:rPr b="1" sz="1400">
-                <a:solidFill>
-                  <a:srgbClr val="1E293B"/>
-                </a:solidFill>
-              </a:rPr>
-              <a:t>XML карта за изображения (#5b): </a:t>
-            </a:r>
-            <a:r>
-              <a:rPr sz="1400">
+              <a:defRPr sz="1200">
                 <a:solidFill>
                   <a:srgbClr val="475569"/>
                 </a:solidFill>
-              </a:rPr>
-              <a:t>/image-sitemap.xml — Описва 9 ключови технически илюстрации с тагове image:loc, image:title и image:caption.</a:t>
+              </a:defRPr>
+            </a:pPr>
+            <a:r>
+              <a:t>• Посочва дата на последна промяна (lastmod) и приоритет (priority)</a:t>
             </a:r>
           </a:p>
           <a:p>
             <a:pPr>
               <a:spcBef>
-                <a:spcPts val="1000"/>
+                <a:spcPts val="800"/>
               </a:spcBef>
-            </a:pPr>
-            <a:r>
-              <a:rPr b="1" sz="1400">
-                <a:solidFill>
-                  <a:srgbClr val="1E293B"/>
-                </a:solidFill>
-              </a:rPr>
-              <a:t>XML карта за видео (#5c): </a:t>
-            </a:r>
-            <a:r>
-              <a:rPr sz="1400">
+              <a:defRPr sz="1200">
                 <a:solidFill>
                   <a:srgbClr val="475569"/>
                 </a:solidFill>
-              </a:rPr>
-              <a:t>/video-sitemap.xml — Предоставя на Google пълни данни за видеоклипа за ремонт на ABS (player_loc, content_loc, времетраене, thumbnail).</a:t>
+              </a:defRPr>
+            </a:pPr>
+            <a:r>
+              <a:t>• Улеснява пълното обхождане от роботите на търсачките</a:t>
+            </a:r>
+          </a:p>
+        </p:txBody>
+      </p:sp>
+      <p:sp>
+        <p:nvSpPr>
+          <p:cNvPr id="7" name="Rounded Rectangle 6"/>
+          <p:cNvSpPr/>
+          <p:nvPr/>
+        </p:nvSpPr>
+        <p:spPr>
+          <a:xfrm>
+            <a:off x="4389120" y="1554480"/>
+            <a:ext cx="3291840" cy="4297680"/>
+          </a:xfrm>
+          <a:prstGeom prst="roundRect">
+            <a:avLst/>
+          </a:prstGeom>
+          <a:solidFill>
+            <a:srgbClr val="FFFFFF"/>
+          </a:solidFill>
+          <a:ln w="19050">
+            <a:solidFill>
+              <a:srgbClr val="E2E8F0"/>
+            </a:solidFill>
+          </a:ln>
+        </p:spPr>
+        <p:style>
+          <a:lnRef idx="1">
+            <a:schemeClr val="accent1"/>
+          </a:lnRef>
+          <a:fillRef idx="3">
+            <a:schemeClr val="accent1"/>
+          </a:fillRef>
+          <a:effectRef idx="2">
+            <a:schemeClr val="accent1"/>
+          </a:effectRef>
+          <a:fontRef idx="minor">
+            <a:schemeClr val="lt1"/>
+          </a:fontRef>
+        </p:style>
+        <p:txBody>
+          <a:bodyPr rtlCol="0" anchor="ctr" wrap="square" lIns="228600" tIns="228600" rIns="228600" bIns="228600"/>
+          <a:lstStyle/>
+          <a:p>
+            <a:pPr algn="ctr">
+              <a:defRPr b="1" sz="1600">
+                <a:solidFill>
+                  <a:srgbClr val="1E3A8A"/>
+                </a:solidFill>
+              </a:defRPr>
+            </a:pPr>
+            <a:r>
+              <a:t>Карта за изображения (/image-sitemap.xml)</a:t>
             </a:r>
           </a:p>
           <a:p>
             <a:pPr>
               <a:spcBef>
-                <a:spcPts val="1000"/>
+                <a:spcPts val="800"/>
               </a:spcBef>
-            </a:pPr>
-            <a:r>
-              <a:rPr b="1" sz="1400">
-                <a:solidFill>
-                  <a:srgbClr val="1E293B"/>
-                </a:solidFill>
-              </a:rPr>
-              <a:t>Файл robots.txt: </a:t>
-            </a:r>
-            <a:r>
-              <a:rPr sz="1400">
+              <a:defRPr sz="1200">
                 <a:solidFill>
                   <a:srgbClr val="475569"/>
                 </a:solidFill>
-              </a:rPr>
-              <a:t>Съдържа валидни директиви User-agent: * и изрично декларира адресите на трите карти за търсачките.</a:t>
+              </a:defRPr>
+            </a:pPr>
+            <a:r>
+              <a:t>• Съставена по официалната Google Image схема</a:t>
+            </a:r>
+          </a:p>
+          <a:p>
+            <a:pPr>
+              <a:spcBef>
+                <a:spcPts val="800"/>
+              </a:spcBef>
+              <a:defRPr sz="1200">
+                <a:solidFill>
+                  <a:srgbClr val="475569"/>
+                </a:solidFill>
+              </a:defRPr>
+            </a:pPr>
+            <a:r>
+              <a:t>• Описва 9 ключови технически снимки и схеми</a:t>
+            </a:r>
+          </a:p>
+          <a:p>
+            <a:pPr>
+              <a:spcBef>
+                <a:spcPts val="800"/>
+              </a:spcBef>
+              <a:defRPr sz="1200">
+                <a:solidFill>
+                  <a:srgbClr val="475569"/>
+                </a:solidFill>
+              </a:defRPr>
+            </a:pPr>
+            <a:r>
+              <a:t>• Позволява класиране на изображенията в Google Снимки</a:t>
+            </a:r>
+          </a:p>
+        </p:txBody>
+      </p:sp>
+      <p:sp>
+        <p:nvSpPr>
+          <p:cNvPr id="8" name="Rounded Rectangle 7"/>
+          <p:cNvSpPr/>
+          <p:nvPr/>
+        </p:nvSpPr>
+        <p:spPr>
+          <a:xfrm>
+            <a:off x="8046720" y="1554480"/>
+            <a:ext cx="3291840" cy="4297680"/>
+          </a:xfrm>
+          <a:prstGeom prst="roundRect">
+            <a:avLst/>
+          </a:prstGeom>
+          <a:solidFill>
+            <a:srgbClr val="FFFFFF"/>
+          </a:solidFill>
+          <a:ln w="19050">
+            <a:solidFill>
+              <a:srgbClr val="E2E8F0"/>
+            </a:solidFill>
+          </a:ln>
+        </p:spPr>
+        <p:style>
+          <a:lnRef idx="1">
+            <a:schemeClr val="accent1"/>
+          </a:lnRef>
+          <a:fillRef idx="3">
+            <a:schemeClr val="accent1"/>
+          </a:fillRef>
+          <a:effectRef idx="2">
+            <a:schemeClr val="accent1"/>
+          </a:effectRef>
+          <a:fontRef idx="minor">
+            <a:schemeClr val="lt1"/>
+          </a:fontRef>
+        </p:style>
+        <p:txBody>
+          <a:bodyPr rtlCol="0" anchor="ctr" wrap="square" lIns="228600" tIns="228600" rIns="228600" bIns="228600"/>
+          <a:lstStyle/>
+          <a:p>
+            <a:pPr algn="ctr">
+              <a:defRPr b="1" sz="1600">
+                <a:solidFill>
+                  <a:srgbClr val="1E3A8A"/>
+                </a:solidFill>
+              </a:defRPr>
+            </a:pPr>
+            <a:r>
+              <a:t>Карта за видео съдържание (/video-sitemap.xml)</a:t>
+            </a:r>
+          </a:p>
+          <a:p>
+            <a:pPr>
+              <a:spcBef>
+                <a:spcPts val="800"/>
+              </a:spcBef>
+              <a:defRPr sz="1200">
+                <a:solidFill>
+                  <a:srgbClr val="475569"/>
+                </a:solidFill>
+              </a:defRPr>
+            </a:pPr>
+            <a:r>
+              <a:t>• Съдържа пълни метаданни за видео ръководството за ремонт на ABS</a:t>
+            </a:r>
+          </a:p>
+          <a:p>
+            <a:pPr>
+              <a:spcBef>
+                <a:spcPts val="800"/>
+              </a:spcBef>
+              <a:defRPr sz="1200">
+                <a:solidFill>
+                  <a:srgbClr val="475569"/>
+                </a:solidFill>
+              </a:defRPr>
+            </a:pPr>
+            <a:r>
+              <a:t>• Включва адрес на плейъра, thumbnail и времетраене</a:t>
+            </a:r>
+          </a:p>
+          <a:p>
+            <a:pPr>
+              <a:spcBef>
+                <a:spcPts val="800"/>
+              </a:spcBef>
+              <a:defRPr sz="1200">
+                <a:solidFill>
+                  <a:srgbClr val="475569"/>
+                </a:solidFill>
+              </a:defRPr>
+            </a:pPr>
+            <a:r>
+              <a:t>• Осигурява показване на видео откъс в резултатите от търсене</a:t>
             </a:r>
           </a:p>
         </p:txBody>
@@ -4065,14 +5688,100 @@
       <p:grpSpPr/>
       <p:sp>
         <p:nvSpPr>
-          <p:cNvPr id="2" name="TextBox 1"/>
+          <p:cNvPr id="2" name="Rectangle 1"/>
+          <p:cNvSpPr/>
+          <p:nvPr/>
+        </p:nvSpPr>
+        <p:spPr>
+          <a:xfrm>
+            <a:off x="0" y="0"/>
+            <a:ext cx="12191695" cy="6858000"/>
+          </a:xfrm>
+          <a:prstGeom prst="rect">
+            <a:avLst/>
+          </a:prstGeom>
+          <a:solidFill>
+            <a:srgbClr val="F8FAFC"/>
+          </a:solidFill>
+          <a:ln>
+            <a:noFill/>
+          </a:ln>
+        </p:spPr>
+        <p:style>
+          <a:lnRef idx="1">
+            <a:schemeClr val="accent1"/>
+          </a:lnRef>
+          <a:fillRef idx="3">
+            <a:schemeClr val="accent1"/>
+          </a:fillRef>
+          <a:effectRef idx="2">
+            <a:schemeClr val="accent1"/>
+          </a:effectRef>
+          <a:fontRef idx="minor">
+            <a:schemeClr val="lt1"/>
+          </a:fontRef>
+        </p:style>
+        <p:txBody>
+          <a:bodyPr rtlCol="0" anchor="ctr"/>
+          <a:lstStyle/>
+          <a:p>
+            <a:pPr algn="ctr"/>
+          </a:p>
+        </p:txBody>
+      </p:sp>
+      <p:sp>
+        <p:nvSpPr>
+          <p:cNvPr id="3" name="Rectangle 2"/>
+          <p:cNvSpPr/>
+          <p:nvPr/>
+        </p:nvSpPr>
+        <p:spPr>
+          <a:xfrm>
+            <a:off x="0" y="0"/>
+            <a:ext cx="12191695" cy="109728"/>
+          </a:xfrm>
+          <a:prstGeom prst="rect">
+            <a:avLst/>
+          </a:prstGeom>
+          <a:solidFill>
+            <a:srgbClr val="0284C7"/>
+          </a:solidFill>
+          <a:ln>
+            <a:noFill/>
+          </a:ln>
+        </p:spPr>
+        <p:style>
+          <a:lnRef idx="1">
+            <a:schemeClr val="accent1"/>
+          </a:lnRef>
+          <a:fillRef idx="3">
+            <a:schemeClr val="accent1"/>
+          </a:fillRef>
+          <a:effectRef idx="2">
+            <a:schemeClr val="accent1"/>
+          </a:effectRef>
+          <a:fontRef idx="minor">
+            <a:schemeClr val="lt1"/>
+          </a:fontRef>
+        </p:style>
+        <p:txBody>
+          <a:bodyPr rtlCol="0" anchor="ctr"/>
+          <a:lstStyle/>
+          <a:p>
+            <a:pPr algn="ctr"/>
+          </a:p>
+        </p:txBody>
+      </p:sp>
+      <p:sp>
+        <p:nvSpPr>
+          <p:cNvPr id="4" name="TextBox 3"/>
           <p:cNvSpPr txBox="1"/>
           <p:nvPr/>
         </p:nvSpPr>
         <p:spPr>
           <a:xfrm>
-            <a:off x="731520" y="457200"/>
-            <a:ext cx="7680960" cy="1097280"/>
+            <a:off x="731520" y="365760"/>
+            <a:ext cx="10698480" cy="1005840"/>
           </a:xfrm>
           <a:prstGeom prst="rect">
             <a:avLst/>
@@ -4080,7 +5789,7 @@
           <a:noFill/>
         </p:spPr>
         <p:txBody>
-          <a:bodyPr wrap="square">
+          <a:bodyPr wrap="square" lIns="0" tIns="0" rIns="0" bIns="0">
             <a:spAutoFit/>
           </a:bodyPr>
           <a:lstStyle/>
@@ -4088,38 +5797,41 @@
             <a:pPr>
               <a:defRPr sz="1100" b="1">
                 <a:solidFill>
-                  <a:srgbClr val="2563EB"/>
-                </a:solidFill>
-              </a:defRPr>
-            </a:pPr>
-            <a:r>
-              <a:t>CSCB700 - ОПТИМИЗАЦИЯ ЗА ТЪРСАЧКИ В УЕБ</a:t>
-            </a:r>
-          </a:p>
-          <a:p>
-            <a:pPr>
+                  <a:srgbClr val="0284C7"/>
+                </a:solidFill>
+              </a:defRPr>
+            </a:pPr>
+            <a:r>
+              <a:t>CSCB700 • ОПТИМИЗАЦИЯ ЗА ТЪРСАЧКИ В УЕБ</a:t>
+            </a:r>
+          </a:p>
+          <a:p>
+            <a:pPr>
+              <a:spcBef>
+                <a:spcPts val="400"/>
+              </a:spcBef>
               <a:defRPr sz="2200" b="1">
                 <a:solidFill>
-                  <a:srgbClr val="0F172A"/>
-                </a:solidFill>
-              </a:defRPr>
-            </a:pPr>
-            <a:r>
-              <a:t>5. Мултимедия и видео демонстрация (Изискване #5c)</a:t>
-            </a:r>
-          </a:p>
-        </p:txBody>
-      </p:sp>
-      <p:sp>
-        <p:nvSpPr>
-          <p:cNvPr id="3" name="TextBox 2"/>
+                  <a:srgbClr val="1E3A8A"/>
+                </a:solidFill>
+              </a:defRPr>
+            </a:pPr>
+            <a:r>
+              <a:t>Мултимедия и видео демонстрация на сервизен процес</a:t>
+            </a:r>
+          </a:p>
+        </p:txBody>
+      </p:sp>
+      <p:sp>
+        <p:nvSpPr>
+          <p:cNvPr id="5" name="TextBox 4"/>
           <p:cNvSpPr txBox="1"/>
           <p:nvPr/>
         </p:nvSpPr>
         <p:spPr>
           <a:xfrm>
-            <a:off x="731520" y="1645920"/>
-            <a:ext cx="7680960" cy="4389120"/>
+            <a:off x="731520" y="6309360"/>
+            <a:ext cx="10698480" cy="365760"/>
           </a:xfrm>
           <a:prstGeom prst="rect">
             <a:avLst/>
@@ -4127,95 +5839,296 @@
           <a:noFill/>
         </p:spPr>
         <p:txBody>
-          <a:bodyPr wrap="square">
+          <a:bodyPr wrap="none" lIns="0" tIns="0" rIns="0" bIns="0">
             <a:spAutoFit/>
           </a:bodyPr>
           <a:lstStyle/>
           <a:p>
-            <a:r>
-              <a:rPr b="1" sz="1400">
-                <a:solidFill>
-                  <a:srgbClr val="1E293B"/>
-                </a:solidFill>
-              </a:rPr>
-              <a:t>Локация: </a:t>
-            </a:r>
-            <a:r>
-              <a:rPr sz="1400">
+            <a:pPr>
+              <a:defRPr sz="1000">
+                <a:solidFill>
+                  <a:srgbClr val="94A3B8"/>
+                </a:solidFill>
+              </a:defRPr>
+            </a:pPr>
+            <a:r>
+              <a:t>AutoElektronik — Лабораторен сервиз за автоелектроника | Преподавател: Елисавета Тричкова-Кашъмова</a:t>
+            </a:r>
+          </a:p>
+        </p:txBody>
+      </p:sp>
+      <p:sp>
+        <p:nvSpPr>
+          <p:cNvPr id="6" name="Rounded Rectangle 5"/>
+          <p:cNvSpPr/>
+          <p:nvPr/>
+        </p:nvSpPr>
+        <p:spPr>
+          <a:xfrm>
+            <a:off x="731520" y="1554480"/>
+            <a:ext cx="5120640" cy="2103120"/>
+          </a:xfrm>
+          <a:prstGeom prst="roundRect">
+            <a:avLst/>
+          </a:prstGeom>
+          <a:solidFill>
+            <a:srgbClr val="FFFFFF"/>
+          </a:solidFill>
+          <a:ln w="19050">
+            <a:solidFill>
+              <a:srgbClr val="E2E8F0"/>
+            </a:solidFill>
+          </a:ln>
+        </p:spPr>
+        <p:style>
+          <a:lnRef idx="1">
+            <a:schemeClr val="accent1"/>
+          </a:lnRef>
+          <a:fillRef idx="3">
+            <a:schemeClr val="accent1"/>
+          </a:fillRef>
+          <a:effectRef idx="2">
+            <a:schemeClr val="accent1"/>
+          </a:effectRef>
+          <a:fontRef idx="minor">
+            <a:schemeClr val="lt1"/>
+          </a:fontRef>
+        </p:style>
+        <p:txBody>
+          <a:bodyPr rtlCol="0" anchor="ctr" wrap="square" lIns="228600" tIns="182880" rIns="228600" bIns="182880"/>
+          <a:lstStyle/>
+          <a:p>
+            <a:pPr algn="ctr">
+              <a:defRPr b="1" sz="1500">
+                <a:solidFill>
+                  <a:srgbClr val="1E3A8A"/>
+                </a:solidFill>
+              </a:defRPr>
+            </a:pPr>
+            <a:r>
+              <a:t>Реално техническо ръководство</a:t>
+            </a:r>
+          </a:p>
+          <a:p>
+            <a:pPr>
+              <a:spcBef>
+                <a:spcPts val="600"/>
+              </a:spcBef>
+              <a:defRPr sz="1300">
                 <a:solidFill>
                   <a:srgbClr val="475569"/>
                 </a:solidFill>
-              </a:rPr>
-              <a:t>Страница за ремонт на ABS модул (/uslugi/remont-na-abs-modul/).</a:t>
+              </a:defRPr>
+            </a:pPr>
+            <a:r>
+              <a:t>На страницата за ремонт на ABS модул е вграден плейър с популярно Full HD видео ръководство за модул ATE MK60.</a:t>
+            </a:r>
+          </a:p>
+        </p:txBody>
+      </p:sp>
+      <p:sp>
+        <p:nvSpPr>
+          <p:cNvPr id="7" name="Rounded Rectangle 6"/>
+          <p:cNvSpPr/>
+          <p:nvPr/>
+        </p:nvSpPr>
+        <p:spPr>
+          <a:xfrm>
+            <a:off x="6309360" y="1554480"/>
+            <a:ext cx="5120640" cy="2103120"/>
+          </a:xfrm>
+          <a:prstGeom prst="roundRect">
+            <a:avLst/>
+          </a:prstGeom>
+          <a:solidFill>
+            <a:srgbClr val="FFFFFF"/>
+          </a:solidFill>
+          <a:ln w="19050">
+            <a:solidFill>
+              <a:srgbClr val="E2E8F0"/>
+            </a:solidFill>
+          </a:ln>
+        </p:spPr>
+        <p:style>
+          <a:lnRef idx="1">
+            <a:schemeClr val="accent1"/>
+          </a:lnRef>
+          <a:fillRef idx="3">
+            <a:schemeClr val="accent1"/>
+          </a:fillRef>
+          <a:effectRef idx="2">
+            <a:schemeClr val="accent1"/>
+          </a:effectRef>
+          <a:fontRef idx="minor">
+            <a:schemeClr val="lt1"/>
+          </a:fontRef>
+        </p:style>
+        <p:txBody>
+          <a:bodyPr rtlCol="0" anchor="ctr" wrap="square" lIns="228600" tIns="182880" rIns="228600" bIns="182880"/>
+          <a:lstStyle/>
+          <a:p>
+            <a:pPr algn="ctr">
+              <a:defRPr b="1" sz="1500">
+                <a:solidFill>
+                  <a:srgbClr val="1E3A8A"/>
+                </a:solidFill>
+              </a:defRPr>
+            </a:pPr>
+            <a:r>
+              <a:t>Показани етапи на работа</a:t>
             </a:r>
           </a:p>
           <a:p>
             <a:pPr>
               <a:spcBef>
-                <a:spcPts val="1000"/>
+                <a:spcPts val="600"/>
               </a:spcBef>
-            </a:pPr>
-            <a:r>
-              <a:rPr b="1" sz="1400">
-                <a:solidFill>
-                  <a:srgbClr val="1E293B"/>
-                </a:solidFill>
-              </a:rPr>
-              <a:t>Реално видео ръководство: </a:t>
-            </a:r>
-            <a:r>
-              <a:rPr sz="1400">
+              <a:defRPr sz="1300">
                 <a:solidFill>
                   <a:srgbClr val="475569"/>
                 </a:solidFill>
-              </a:rPr>
-              <a:t>Вграден адаптивен Full HD видео плейър с популярното ръководство за ремонт на модул ATE MK60.</a:t>
+              </a:defRPr>
+            </a:pPr>
+            <a:r>
+              <a:t>Демонстрира се реалният сервизен процес: демонтаж на хидравличния блок, тест на електромотора и микрозапояване на пиновете.</a:t>
+            </a:r>
+          </a:p>
+        </p:txBody>
+      </p:sp>
+      <p:sp>
+        <p:nvSpPr>
+          <p:cNvPr id="8" name="Rounded Rectangle 7"/>
+          <p:cNvSpPr/>
+          <p:nvPr/>
+        </p:nvSpPr>
+        <p:spPr>
+          <a:xfrm>
+            <a:off x="731520" y="3931920"/>
+            <a:ext cx="5120640" cy="2103120"/>
+          </a:xfrm>
+          <a:prstGeom prst="roundRect">
+            <a:avLst/>
+          </a:prstGeom>
+          <a:solidFill>
+            <a:srgbClr val="FFFFFF"/>
+          </a:solidFill>
+          <a:ln w="19050">
+            <a:solidFill>
+              <a:srgbClr val="E2E8F0"/>
+            </a:solidFill>
+          </a:ln>
+        </p:spPr>
+        <p:style>
+          <a:lnRef idx="1">
+            <a:schemeClr val="accent1"/>
+          </a:lnRef>
+          <a:fillRef idx="3">
+            <a:schemeClr val="accent1"/>
+          </a:fillRef>
+          <a:effectRef idx="2">
+            <a:schemeClr val="accent1"/>
+          </a:effectRef>
+          <a:fontRef idx="minor">
+            <a:schemeClr val="lt1"/>
+          </a:fontRef>
+        </p:style>
+        <p:txBody>
+          <a:bodyPr rtlCol="0" anchor="ctr" wrap="square" lIns="228600" tIns="182880" rIns="228600" bIns="182880"/>
+          <a:lstStyle/>
+          <a:p>
+            <a:pPr algn="ctr">
+              <a:defRPr b="1" sz="1500">
+                <a:solidFill>
+                  <a:srgbClr val="1E3A8A"/>
+                </a:solidFill>
+              </a:defRPr>
+            </a:pPr>
+            <a:r>
+              <a:t>Поверителен плейър</a:t>
             </a:r>
           </a:p>
           <a:p>
             <a:pPr>
               <a:spcBef>
-                <a:spcPts val="1000"/>
+                <a:spcPts val="600"/>
               </a:spcBef>
-            </a:pPr>
-            <a:r>
-              <a:rPr b="1" sz="1400">
-                <a:solidFill>
-                  <a:srgbClr val="1E293B"/>
-                </a:solidFill>
-              </a:rPr>
-              <a:t>Показан сервизен процес: </a:t>
-            </a:r>
-            <a:r>
-              <a:rPr sz="1400">
+              <a:defRPr sz="1300">
                 <a:solidFill>
                   <a:srgbClr val="475569"/>
                 </a:solidFill>
-              </a:rPr>
-              <a:t>Разглобяване на хидравличната помпа, разхерметизиране на платката, тест на електромотора и микрозапояване на пиновете.</a:t>
+              </a:defRPr>
+            </a:pPr>
+            <a:r>
+              <a:t>Вграждането използва youtube-nocookie.com с висока степен на защита на клиентските данни и адаптивен 16:9 изглед.</a:t>
+            </a:r>
+          </a:p>
+        </p:txBody>
+      </p:sp>
+      <p:sp>
+        <p:nvSpPr>
+          <p:cNvPr id="9" name="Rounded Rectangle 8"/>
+          <p:cNvSpPr/>
+          <p:nvPr/>
+        </p:nvSpPr>
+        <p:spPr>
+          <a:xfrm>
+            <a:off x="6309360" y="3931920"/>
+            <a:ext cx="5120640" cy="2103120"/>
+          </a:xfrm>
+          <a:prstGeom prst="roundRect">
+            <a:avLst/>
+          </a:prstGeom>
+          <a:solidFill>
+            <a:srgbClr val="FFFFFF"/>
+          </a:solidFill>
+          <a:ln w="19050">
+            <a:solidFill>
+              <a:srgbClr val="E2E8F0"/>
+            </a:solidFill>
+          </a:ln>
+        </p:spPr>
+        <p:style>
+          <a:lnRef idx="1">
+            <a:schemeClr val="accent1"/>
+          </a:lnRef>
+          <a:fillRef idx="3">
+            <a:schemeClr val="accent1"/>
+          </a:fillRef>
+          <a:effectRef idx="2">
+            <a:schemeClr val="accent1"/>
+          </a:effectRef>
+          <a:fontRef idx="minor">
+            <a:schemeClr val="lt1"/>
+          </a:fontRef>
+        </p:style>
+        <p:txBody>
+          <a:bodyPr rtlCol="0" anchor="ctr" wrap="square" lIns="228600" tIns="182880" rIns="228600" bIns="182880"/>
+          <a:lstStyle/>
+          <a:p>
+            <a:pPr algn="ctr">
+              <a:defRPr b="1" sz="1500">
+                <a:solidFill>
+                  <a:srgbClr val="1E3A8A"/>
+                </a:solidFill>
+              </a:defRPr>
+            </a:pPr>
+            <a:r>
+              <a:t>Алтернативен локален плейър</a:t>
             </a:r>
           </a:p>
           <a:p>
             <a:pPr>
               <a:spcBef>
-                <a:spcPts val="1000"/>
+                <a:spcPts val="600"/>
               </a:spcBef>
-            </a:pPr>
-            <a:r>
-              <a:rPr b="1" sz="1400">
-                <a:solidFill>
-                  <a:srgbClr val="1E293B"/>
-                </a:solidFill>
-              </a:rPr>
-              <a:t>Локален HTML5 резервен вариант: </a:t>
-            </a:r>
-            <a:r>
-              <a:rPr sz="1400">
+              <a:defRPr sz="1300">
                 <a:solidFill>
                   <a:srgbClr val="475569"/>
                 </a:solidFill>
-              </a:rPr>
-              <a:t>Сайтът разполага и с локален MP4 файл и алтернативен плейър за директно възпроизвеждане или изтегляне.</a:t>
+              </a:defRPr>
+            </a:pPr>
+            <a:r>
+              <a:t>Сайтът разполага и с локален MP4 файл за директно сваляне или възпроизвеждане от потребители без външен достъп.</a:t>
             </a:r>
           </a:p>
         </p:txBody>
@@ -4240,14 +6153,100 @@
       <p:grpSpPr/>
       <p:sp>
         <p:nvSpPr>
-          <p:cNvPr id="2" name="TextBox 1"/>
+          <p:cNvPr id="2" name="Rectangle 1"/>
+          <p:cNvSpPr/>
+          <p:nvPr/>
+        </p:nvSpPr>
+        <p:spPr>
+          <a:xfrm>
+            <a:off x="0" y="0"/>
+            <a:ext cx="12191695" cy="6858000"/>
+          </a:xfrm>
+          <a:prstGeom prst="rect">
+            <a:avLst/>
+          </a:prstGeom>
+          <a:solidFill>
+            <a:srgbClr val="F8FAFC"/>
+          </a:solidFill>
+          <a:ln>
+            <a:noFill/>
+          </a:ln>
+        </p:spPr>
+        <p:style>
+          <a:lnRef idx="1">
+            <a:schemeClr val="accent1"/>
+          </a:lnRef>
+          <a:fillRef idx="3">
+            <a:schemeClr val="accent1"/>
+          </a:fillRef>
+          <a:effectRef idx="2">
+            <a:schemeClr val="accent1"/>
+          </a:effectRef>
+          <a:fontRef idx="minor">
+            <a:schemeClr val="lt1"/>
+          </a:fontRef>
+        </p:style>
+        <p:txBody>
+          <a:bodyPr rtlCol="0" anchor="ctr"/>
+          <a:lstStyle/>
+          <a:p>
+            <a:pPr algn="ctr"/>
+          </a:p>
+        </p:txBody>
+      </p:sp>
+      <p:sp>
+        <p:nvSpPr>
+          <p:cNvPr id="3" name="Rectangle 2"/>
+          <p:cNvSpPr/>
+          <p:nvPr/>
+        </p:nvSpPr>
+        <p:spPr>
+          <a:xfrm>
+            <a:off x="0" y="0"/>
+            <a:ext cx="12191695" cy="109728"/>
+          </a:xfrm>
+          <a:prstGeom prst="rect">
+            <a:avLst/>
+          </a:prstGeom>
+          <a:solidFill>
+            <a:srgbClr val="0284C7"/>
+          </a:solidFill>
+          <a:ln>
+            <a:noFill/>
+          </a:ln>
+        </p:spPr>
+        <p:style>
+          <a:lnRef idx="1">
+            <a:schemeClr val="accent1"/>
+          </a:lnRef>
+          <a:fillRef idx="3">
+            <a:schemeClr val="accent1"/>
+          </a:fillRef>
+          <a:effectRef idx="2">
+            <a:schemeClr val="accent1"/>
+          </a:effectRef>
+          <a:fontRef idx="minor">
+            <a:schemeClr val="lt1"/>
+          </a:fontRef>
+        </p:style>
+        <p:txBody>
+          <a:bodyPr rtlCol="0" anchor="ctr"/>
+          <a:lstStyle/>
+          <a:p>
+            <a:pPr algn="ctr"/>
+          </a:p>
+        </p:txBody>
+      </p:sp>
+      <p:sp>
+        <p:nvSpPr>
+          <p:cNvPr id="4" name="TextBox 3"/>
           <p:cNvSpPr txBox="1"/>
           <p:nvPr/>
         </p:nvSpPr>
         <p:spPr>
           <a:xfrm>
-            <a:off x="731520" y="457200"/>
-            <a:ext cx="7680960" cy="1097280"/>
+            <a:off x="731520" y="365760"/>
+            <a:ext cx="10698480" cy="1005840"/>
           </a:xfrm>
           <a:prstGeom prst="rect">
             <a:avLst/>
@@ -4255,7 +6254,7 @@
           <a:noFill/>
         </p:spPr>
         <p:txBody>
-          <a:bodyPr wrap="square">
+          <a:bodyPr wrap="square" lIns="0" tIns="0" rIns="0" bIns="0">
             <a:spAutoFit/>
           </a:bodyPr>
           <a:lstStyle/>
@@ -4263,38 +6262,41 @@
             <a:pPr>
               <a:defRPr sz="1100" b="1">
                 <a:solidFill>
-                  <a:srgbClr val="2563EB"/>
-                </a:solidFill>
-              </a:defRPr>
-            </a:pPr>
-            <a:r>
-              <a:t>CSCB700 - ОПТИМИЗАЦИЯ ЗА ТЪРСАЧКИ В УЕБ</a:t>
-            </a:r>
-          </a:p>
-          <a:p>
-            <a:pPr>
+                  <a:srgbClr val="0284C7"/>
+                </a:solidFill>
+              </a:defRPr>
+            </a:pPr>
+            <a:r>
+              <a:t>CSCB700 • ОПТИМИЗАЦИЯ ЗА ТЪРСАЧКИ В УЕБ</a:t>
+            </a:r>
+          </a:p>
+          <a:p>
+            <a:pPr>
+              <a:spcBef>
+                <a:spcPts val="400"/>
+              </a:spcBef>
               <a:defRPr sz="2200" b="1">
                 <a:solidFill>
-                  <a:srgbClr val="0F172A"/>
-                </a:solidFill>
-              </a:defRPr>
-            </a:pPr>
-            <a:r>
-              <a:t>6. Техническа скорост и измервания (Изискване #29)</a:t>
-            </a:r>
-          </a:p>
-        </p:txBody>
-      </p:sp>
-      <p:sp>
-        <p:nvSpPr>
-          <p:cNvPr id="3" name="TextBox 2"/>
+                  <a:srgbClr val="1E3A8A"/>
+                </a:solidFill>
+              </a:defRPr>
+            </a:pPr>
+            <a:r>
+              <a:t>Техническа скорост и измервания на производителността</a:t>
+            </a:r>
+          </a:p>
+        </p:txBody>
+      </p:sp>
+      <p:sp>
+        <p:nvSpPr>
+          <p:cNvPr id="5" name="TextBox 4"/>
           <p:cNvSpPr txBox="1"/>
           <p:nvPr/>
         </p:nvSpPr>
         <p:spPr>
           <a:xfrm>
-            <a:off x="731520" y="1645920"/>
-            <a:ext cx="7680960" cy="4389120"/>
+            <a:off x="731520" y="6309360"/>
+            <a:ext cx="10698480" cy="365760"/>
           </a:xfrm>
           <a:prstGeom prst="rect">
             <a:avLst/>
@@ -4302,95 +6304,317 @@
           <a:noFill/>
         </p:spPr>
         <p:txBody>
-          <a:bodyPr wrap="square">
+          <a:bodyPr wrap="none" lIns="0" tIns="0" rIns="0" bIns="0">
             <a:spAutoFit/>
           </a:bodyPr>
           <a:lstStyle/>
           <a:p>
-            <a:r>
-              <a:rPr b="1" sz="1400">
-                <a:solidFill>
-                  <a:srgbClr val="1E293B"/>
-                </a:solidFill>
-              </a:rPr>
-              <a:t>Google PageSpeed Score: </a:t>
-            </a:r>
-            <a:r>
-              <a:rPr sz="1400">
+            <a:pPr>
+              <a:defRPr sz="1000">
+                <a:solidFill>
+                  <a:srgbClr val="94A3B8"/>
+                </a:solidFill>
+              </a:defRPr>
+            </a:pPr>
+            <a:r>
+              <a:t>AutoElektronik — Лабораторен сервиз за автоелектроника | Преподавател: Елисавета Тричкова-Кашъмова</a:t>
+            </a:r>
+          </a:p>
+        </p:txBody>
+      </p:sp>
+      <p:sp>
+        <p:nvSpPr>
+          <p:cNvPr id="6" name="Rounded Rectangle 5"/>
+          <p:cNvSpPr/>
+          <p:nvPr/>
+        </p:nvSpPr>
+        <p:spPr>
+          <a:xfrm>
+            <a:off x="731520" y="1554480"/>
+            <a:ext cx="3291840" cy="4297680"/>
+          </a:xfrm>
+          <a:prstGeom prst="roundRect">
+            <a:avLst/>
+          </a:prstGeom>
+          <a:solidFill>
+            <a:srgbClr val="FFFFFF"/>
+          </a:solidFill>
+          <a:ln w="19050">
+            <a:solidFill>
+              <a:srgbClr val="E2E8F0"/>
+            </a:solidFill>
+          </a:ln>
+        </p:spPr>
+        <p:style>
+          <a:lnRef idx="1">
+            <a:schemeClr val="accent1"/>
+          </a:lnRef>
+          <a:fillRef idx="3">
+            <a:schemeClr val="accent1"/>
+          </a:fillRef>
+          <a:effectRef idx="2">
+            <a:schemeClr val="accent1"/>
+          </a:effectRef>
+          <a:fontRef idx="minor">
+            <a:schemeClr val="lt1"/>
+          </a:fontRef>
+        </p:style>
+        <p:txBody>
+          <a:bodyPr rtlCol="0" anchor="ctr" wrap="square" lIns="228600" tIns="228600" rIns="228600" bIns="228600"/>
+          <a:lstStyle/>
+          <a:p>
+            <a:pPr algn="ctr">
+              <a:defRPr b="1" sz="1600">
+                <a:solidFill>
+                  <a:srgbClr val="1E3A8A"/>
+                </a:solidFill>
+              </a:defRPr>
+            </a:pPr>
+            <a:r>
+              <a:t>Google PageSpeed резултати</a:t>
+            </a:r>
+          </a:p>
+          <a:p>
+            <a:pPr>
+              <a:spcBef>
+                <a:spcPts val="800"/>
+              </a:spcBef>
+              <a:defRPr sz="1200">
                 <a:solidFill>
                   <a:srgbClr val="475569"/>
                 </a:solidFill>
-              </a:rPr>
-              <a:t>100 / 100 точки за Desktop и 98-100 / 100 за Mobile благодарение на статичното генериране без тежки скриптове.</a:t>
+              </a:defRPr>
+            </a:pPr>
+            <a:r>
+              <a:t>• 100 / 100 точки за Desktop среда</a:t>
             </a:r>
           </a:p>
           <a:p>
             <a:pPr>
               <a:spcBef>
-                <a:spcPts val="1000"/>
+                <a:spcPts val="800"/>
               </a:spcBef>
-            </a:pPr>
-            <a:r>
-              <a:rPr b="1" sz="1400">
-                <a:solidFill>
-                  <a:srgbClr val="1E293B"/>
-                </a:solidFill>
-              </a:rPr>
-              <a:t>Core Web Vitals: </a:t>
-            </a:r>
-            <a:r>
-              <a:rPr sz="1400">
+              <a:defRPr sz="1200">
                 <a:solidFill>
                   <a:srgbClr val="475569"/>
                 </a:solidFill>
-              </a:rPr>
-              <a:t>LCP (Largest Contentful Paint) = 0.5s; FID (First Input Delay) = 2ms; CLS (Cumulative Layout Shift) = 0.00.</a:t>
+              </a:defRPr>
+            </a:pPr>
+            <a:r>
+              <a:t>• 98 / 100 точки за мобилни устройства</a:t>
             </a:r>
           </a:p>
           <a:p>
             <a:pPr>
               <a:spcBef>
-                <a:spcPts val="1000"/>
+                <a:spcPts val="800"/>
               </a:spcBef>
-            </a:pPr>
-            <a:r>
-              <a:rPr b="1" sz="1400">
-                <a:solidFill>
-                  <a:srgbClr val="1E293B"/>
-                </a:solidFill>
-              </a:rPr>
-              <a:t>Оптимизация на стиловете: </a:t>
-            </a:r>
-            <a:r>
-              <a:rPr sz="1400">
+              <a:defRPr sz="1200">
                 <a:solidFill>
                   <a:srgbClr val="475569"/>
                 </a:solidFill>
-              </a:rPr>
-              <a:t>CSS файлът е компилиран и минифициран до едва 31 KB, зареждан с нулев блокиращ ефект.</a:t>
+              </a:defRPr>
+            </a:pPr>
+            <a:r>
+              <a:t>• Мигновено първоначално визуализиране (под 0.3 секунди)</a:t>
+            </a:r>
+          </a:p>
+        </p:txBody>
+      </p:sp>
+      <p:sp>
+        <p:nvSpPr>
+          <p:cNvPr id="7" name="Rounded Rectangle 6"/>
+          <p:cNvSpPr/>
+          <p:nvPr/>
+        </p:nvSpPr>
+        <p:spPr>
+          <a:xfrm>
+            <a:off x="4389120" y="1554480"/>
+            <a:ext cx="3291840" cy="4297680"/>
+          </a:xfrm>
+          <a:prstGeom prst="roundRect">
+            <a:avLst/>
+          </a:prstGeom>
+          <a:solidFill>
+            <a:srgbClr val="FFFFFF"/>
+          </a:solidFill>
+          <a:ln w="19050">
+            <a:solidFill>
+              <a:srgbClr val="E2E8F0"/>
+            </a:solidFill>
+          </a:ln>
+        </p:spPr>
+        <p:style>
+          <a:lnRef idx="1">
+            <a:schemeClr val="accent1"/>
+          </a:lnRef>
+          <a:fillRef idx="3">
+            <a:schemeClr val="accent1"/>
+          </a:fillRef>
+          <a:effectRef idx="2">
+            <a:schemeClr val="accent1"/>
+          </a:effectRef>
+          <a:fontRef idx="minor">
+            <a:schemeClr val="lt1"/>
+          </a:fontRef>
+        </p:style>
+        <p:txBody>
+          <a:bodyPr rtlCol="0" anchor="ctr" wrap="square" lIns="228600" tIns="228600" rIns="228600" bIns="228600"/>
+          <a:lstStyle/>
+          <a:p>
+            <a:pPr algn="ctr">
+              <a:defRPr b="1" sz="1600">
+                <a:solidFill>
+                  <a:srgbClr val="1E3A8A"/>
+                </a:solidFill>
+              </a:defRPr>
+            </a:pPr>
+            <a:r>
+              <a:t>Метрики Core Web Vitals</a:t>
             </a:r>
           </a:p>
           <a:p>
             <a:pPr>
               <a:spcBef>
-                <a:spcPts val="1000"/>
+                <a:spcPts val="800"/>
               </a:spcBef>
-            </a:pPr>
-            <a:r>
-              <a:rPr b="1" sz="1400">
-                <a:solidFill>
-                  <a:srgbClr val="1E293B"/>
-                </a:solidFill>
-              </a:rPr>
-              <a:t>Предимство пред WordPress: </a:t>
-            </a:r>
-            <a:r>
-              <a:rPr sz="1400">
+              <a:defRPr sz="1200">
                 <a:solidFill>
                   <a:srgbClr val="475569"/>
                 </a:solidFill>
-              </a:rPr>
-              <a:t>Сайтът се зарежда мигновено (под 200 ms TTFB), докато стандартен WordPress сайт с Elementor зарежда за 2.5–4.5 секунди.</a:t>
+              </a:defRPr>
+            </a:pPr>
+            <a:r>
+              <a:t>• Largest Contentful Paint (LCP) = 0.5 s (препоръка &lt; 2.5 s)</a:t>
+            </a:r>
+          </a:p>
+          <a:p>
+            <a:pPr>
+              <a:spcBef>
+                <a:spcPts val="800"/>
+              </a:spcBef>
+              <a:defRPr sz="1200">
+                <a:solidFill>
+                  <a:srgbClr val="475569"/>
+                </a:solidFill>
+              </a:defRPr>
+            </a:pPr>
+            <a:r>
+              <a:t>• Cumulative Layout Shift (CLS) = 0.00 (напълно нулев)</a:t>
+            </a:r>
+          </a:p>
+          <a:p>
+            <a:pPr>
+              <a:spcBef>
+                <a:spcPts val="800"/>
+              </a:spcBef>
+              <a:defRPr sz="1200">
+                <a:solidFill>
+                  <a:srgbClr val="475569"/>
+                </a:solidFill>
+              </a:defRPr>
+            </a:pPr>
+            <a:r>
+              <a:t>• Total Blocking Time (TBT) = 0 ms (липсват тежки блокиращи скриптове)</a:t>
+            </a:r>
+          </a:p>
+        </p:txBody>
+      </p:sp>
+      <p:sp>
+        <p:nvSpPr>
+          <p:cNvPr id="8" name="Rounded Rectangle 7"/>
+          <p:cNvSpPr/>
+          <p:nvPr/>
+        </p:nvSpPr>
+        <p:spPr>
+          <a:xfrm>
+            <a:off x="8046720" y="1554480"/>
+            <a:ext cx="3291840" cy="4297680"/>
+          </a:xfrm>
+          <a:prstGeom prst="roundRect">
+            <a:avLst/>
+          </a:prstGeom>
+          <a:solidFill>
+            <a:srgbClr val="FFFFFF"/>
+          </a:solidFill>
+          <a:ln w="19050">
+            <a:solidFill>
+              <a:srgbClr val="E2E8F0"/>
+            </a:solidFill>
+          </a:ln>
+        </p:spPr>
+        <p:style>
+          <a:lnRef idx="1">
+            <a:schemeClr val="accent1"/>
+          </a:lnRef>
+          <a:fillRef idx="3">
+            <a:schemeClr val="accent1"/>
+          </a:fillRef>
+          <a:effectRef idx="2">
+            <a:schemeClr val="accent1"/>
+          </a:effectRef>
+          <a:fontRef idx="minor">
+            <a:schemeClr val="lt1"/>
+          </a:fontRef>
+        </p:style>
+        <p:txBody>
+          <a:bodyPr rtlCol="0" anchor="ctr" wrap="square" lIns="228600" tIns="228600" rIns="228600" bIns="228600"/>
+          <a:lstStyle/>
+          <a:p>
+            <a:pPr algn="ctr">
+              <a:defRPr b="1" sz="1600">
+                <a:solidFill>
+                  <a:srgbClr val="1E3A8A"/>
+                </a:solidFill>
+              </a:defRPr>
+            </a:pPr>
+            <a:r>
+              <a:t>Технологично предимство</a:t>
+            </a:r>
+          </a:p>
+          <a:p>
+            <a:pPr>
+              <a:spcBef>
+                <a:spcPts val="800"/>
+              </a:spcBef>
+              <a:defRPr sz="1200">
+                <a:solidFill>
+                  <a:srgbClr val="475569"/>
+                </a:solidFill>
+              </a:defRPr>
+            </a:pPr>
+            <a:r>
+              <a:t>• Минифициран CSS файл от едва 31 KB</a:t>
+            </a:r>
+          </a:p>
+          <a:p>
+            <a:pPr>
+              <a:spcBef>
+                <a:spcPts val="800"/>
+              </a:spcBef>
+              <a:defRPr sz="1200">
+                <a:solidFill>
+                  <a:srgbClr val="475569"/>
+                </a:solidFill>
+              </a:defRPr>
+            </a:pPr>
+            <a:r>
+              <a:t>• Статично генериран HTML код без тромави бази данни</a:t>
+            </a:r>
+          </a:p>
+          <a:p>
+            <a:pPr>
+              <a:spcBef>
+                <a:spcPts val="800"/>
+              </a:spcBef>
+              <a:defRPr sz="1200">
+                <a:solidFill>
+                  <a:srgbClr val="475569"/>
+                </a:solidFill>
+              </a:defRPr>
+            </a:pPr>
+            <a:r>
+              <a:t>• Многократно по-висока бързина спрямо стандартни CMS платформи</a:t>
             </a:r>
           </a:p>
         </p:txBody>
@@ -4415,14 +6639,100 @@
       <p:grpSpPr/>
       <p:sp>
         <p:nvSpPr>
-          <p:cNvPr id="2" name="TextBox 1"/>
+          <p:cNvPr id="2" name="Rectangle 1"/>
+          <p:cNvSpPr/>
+          <p:nvPr/>
+        </p:nvSpPr>
+        <p:spPr>
+          <a:xfrm>
+            <a:off x="0" y="0"/>
+            <a:ext cx="12191695" cy="6858000"/>
+          </a:xfrm>
+          <a:prstGeom prst="rect">
+            <a:avLst/>
+          </a:prstGeom>
+          <a:solidFill>
+            <a:srgbClr val="F8FAFC"/>
+          </a:solidFill>
+          <a:ln>
+            <a:noFill/>
+          </a:ln>
+        </p:spPr>
+        <p:style>
+          <a:lnRef idx="1">
+            <a:schemeClr val="accent1"/>
+          </a:lnRef>
+          <a:fillRef idx="3">
+            <a:schemeClr val="accent1"/>
+          </a:fillRef>
+          <a:effectRef idx="2">
+            <a:schemeClr val="accent1"/>
+          </a:effectRef>
+          <a:fontRef idx="minor">
+            <a:schemeClr val="lt1"/>
+          </a:fontRef>
+        </p:style>
+        <p:txBody>
+          <a:bodyPr rtlCol="0" anchor="ctr"/>
+          <a:lstStyle/>
+          <a:p>
+            <a:pPr algn="ctr"/>
+          </a:p>
+        </p:txBody>
+      </p:sp>
+      <p:sp>
+        <p:nvSpPr>
+          <p:cNvPr id="3" name="Rectangle 2"/>
+          <p:cNvSpPr/>
+          <p:nvPr/>
+        </p:nvSpPr>
+        <p:spPr>
+          <a:xfrm>
+            <a:off x="0" y="0"/>
+            <a:ext cx="12191695" cy="109728"/>
+          </a:xfrm>
+          <a:prstGeom prst="rect">
+            <a:avLst/>
+          </a:prstGeom>
+          <a:solidFill>
+            <a:srgbClr val="0284C7"/>
+          </a:solidFill>
+          <a:ln>
+            <a:noFill/>
+          </a:ln>
+        </p:spPr>
+        <p:style>
+          <a:lnRef idx="1">
+            <a:schemeClr val="accent1"/>
+          </a:lnRef>
+          <a:fillRef idx="3">
+            <a:schemeClr val="accent1"/>
+          </a:fillRef>
+          <a:effectRef idx="2">
+            <a:schemeClr val="accent1"/>
+          </a:effectRef>
+          <a:fontRef idx="minor">
+            <a:schemeClr val="lt1"/>
+          </a:fontRef>
+        </p:style>
+        <p:txBody>
+          <a:bodyPr rtlCol="0" anchor="ctr"/>
+          <a:lstStyle/>
+          <a:p>
+            <a:pPr algn="ctr"/>
+          </a:p>
+        </p:txBody>
+      </p:sp>
+      <p:sp>
+        <p:nvSpPr>
+          <p:cNvPr id="4" name="TextBox 3"/>
           <p:cNvSpPr txBox="1"/>
           <p:nvPr/>
         </p:nvSpPr>
         <p:spPr>
           <a:xfrm>
-            <a:off x="731520" y="457200"/>
-            <a:ext cx="7680960" cy="1097280"/>
+            <a:off x="731520" y="365760"/>
+            <a:ext cx="10698480" cy="1005840"/>
           </a:xfrm>
           <a:prstGeom prst="rect">
             <a:avLst/>
@@ -4430,7 +6740,7 @@
           <a:noFill/>
         </p:spPr>
         <p:txBody>
-          <a:bodyPr wrap="square">
+          <a:bodyPr wrap="square" lIns="0" tIns="0" rIns="0" bIns="0">
             <a:spAutoFit/>
           </a:bodyPr>
           <a:lstStyle/>
@@ -4438,38 +6748,41 @@
             <a:pPr>
               <a:defRPr sz="1100" b="1">
                 <a:solidFill>
-                  <a:srgbClr val="2563EB"/>
-                </a:solidFill>
-              </a:defRPr>
-            </a:pPr>
-            <a:r>
-              <a:t>CSCB700 - ОПТИМИЗАЦИЯ ЗА ТЪРСАЧКИ В УЕБ</a:t>
-            </a:r>
-          </a:p>
-          <a:p>
-            <a:pPr>
+                  <a:srgbClr val="0284C7"/>
+                </a:solidFill>
+              </a:defRPr>
+            </a:pPr>
+            <a:r>
+              <a:t>CSCB700 • ОПТИМИЗАЦИЯ ЗА ТЪРСАЧКИ В УЕБ</a:t>
+            </a:r>
+          </a:p>
+          <a:p>
+            <a:pPr>
+              <a:spcBef>
+                <a:spcPts val="400"/>
+              </a:spcBef>
               <a:defRPr sz="2200" b="1">
                 <a:solidFill>
-                  <a:srgbClr val="0F172A"/>
-                </a:solidFill>
-              </a:defRPr>
-            </a:pPr>
-            <a:r>
-              <a:t>7. Структурирани данни и социални метаданни (Изисквания #24, #25)</a:t>
-            </a:r>
-          </a:p>
-        </p:txBody>
-      </p:sp>
-      <p:sp>
-        <p:nvSpPr>
-          <p:cNvPr id="3" name="TextBox 2"/>
+                  <a:srgbClr val="1E3A8A"/>
+                </a:solidFill>
+              </a:defRPr>
+            </a:pPr>
+            <a:r>
+              <a:t>Структурирани данни и социални мета тагове</a:t>
+            </a:r>
+          </a:p>
+        </p:txBody>
+      </p:sp>
+      <p:sp>
+        <p:nvSpPr>
+          <p:cNvPr id="5" name="TextBox 4"/>
           <p:cNvSpPr txBox="1"/>
           <p:nvPr/>
         </p:nvSpPr>
         <p:spPr>
           <a:xfrm>
-            <a:off x="731520" y="1645920"/>
-            <a:ext cx="7680960" cy="4389120"/>
+            <a:off x="731520" y="6309360"/>
+            <a:ext cx="10698480" cy="365760"/>
           </a:xfrm>
           <a:prstGeom prst="rect">
             <a:avLst/>
@@ -4477,95 +6790,296 @@
           <a:noFill/>
         </p:spPr>
         <p:txBody>
-          <a:bodyPr wrap="square">
+          <a:bodyPr wrap="none" lIns="0" tIns="0" rIns="0" bIns="0">
             <a:spAutoFit/>
           </a:bodyPr>
           <a:lstStyle/>
           <a:p>
-            <a:r>
-              <a:rPr b="1" sz="1400">
-                <a:solidFill>
-                  <a:srgbClr val="1E293B"/>
-                </a:solidFill>
-              </a:rPr>
-              <a:t>Schema.org микроданни: </a:t>
-            </a:r>
-            <a:r>
-              <a:rPr sz="1400">
+            <a:pPr>
+              <a:defRPr sz="1000">
+                <a:solidFill>
+                  <a:srgbClr val="94A3B8"/>
+                </a:solidFill>
+              </a:defRPr>
+            </a:pPr>
+            <a:r>
+              <a:t>AutoElektronik — Лабораторен сервиз за автоелектроника | Преподавател: Елисавета Тричкова-Кашъмова</a:t>
+            </a:r>
+          </a:p>
+        </p:txBody>
+      </p:sp>
+      <p:sp>
+        <p:nvSpPr>
+          <p:cNvPr id="6" name="Rounded Rectangle 5"/>
+          <p:cNvSpPr/>
+          <p:nvPr/>
+        </p:nvSpPr>
+        <p:spPr>
+          <a:xfrm>
+            <a:off x="731520" y="1554480"/>
+            <a:ext cx="5120640" cy="2103120"/>
+          </a:xfrm>
+          <a:prstGeom prst="roundRect">
+            <a:avLst/>
+          </a:prstGeom>
+          <a:solidFill>
+            <a:srgbClr val="FFFFFF"/>
+          </a:solidFill>
+          <a:ln w="19050">
+            <a:solidFill>
+              <a:srgbClr val="E2E8F0"/>
+            </a:solidFill>
+          </a:ln>
+        </p:spPr>
+        <p:style>
+          <a:lnRef idx="1">
+            <a:schemeClr val="accent1"/>
+          </a:lnRef>
+          <a:fillRef idx="3">
+            <a:schemeClr val="accent1"/>
+          </a:fillRef>
+          <a:effectRef idx="2">
+            <a:schemeClr val="accent1"/>
+          </a:effectRef>
+          <a:fontRef idx="minor">
+            <a:schemeClr val="lt1"/>
+          </a:fontRef>
+        </p:style>
+        <p:txBody>
+          <a:bodyPr rtlCol="0" anchor="ctr" wrap="square" lIns="228600" tIns="182880" rIns="228600" bIns="182880"/>
+          <a:lstStyle/>
+          <a:p>
+            <a:pPr algn="ctr">
+              <a:defRPr b="1" sz="1500">
+                <a:solidFill>
+                  <a:srgbClr val="1E3A8A"/>
+                </a:solidFill>
+              </a:defRPr>
+            </a:pPr>
+            <a:r>
+              <a:t>Schema.org микроданни</a:t>
+            </a:r>
+          </a:p>
+          <a:p>
+            <a:pPr>
+              <a:spcBef>
+                <a:spcPts val="600"/>
+              </a:spcBef>
+              <a:defRPr sz="1300">
                 <a:solidFill>
                   <a:srgbClr val="475569"/>
                 </a:solidFill>
-              </a:rPr>
-              <a:t>Внедрени типове AutoRepair (сервиз), DiagnosticProcedure (диагностика), Service (услуги) и VideoObject.</a:t>
+              </a:defRPr>
+            </a:pPr>
+            <a:r>
+              <a:t>Внедрени са JSON-LD схеми за AutoRepair, Service, DiagnosticProcedure и VideoObject, предоставящи точни данни на търсачките.</a:t>
+            </a:r>
+          </a:p>
+        </p:txBody>
+      </p:sp>
+      <p:sp>
+        <p:nvSpPr>
+          <p:cNvPr id="7" name="Rounded Rectangle 6"/>
+          <p:cNvSpPr/>
+          <p:nvPr/>
+        </p:nvSpPr>
+        <p:spPr>
+          <a:xfrm>
+            <a:off x="6309360" y="1554480"/>
+            <a:ext cx="5120640" cy="2103120"/>
+          </a:xfrm>
+          <a:prstGeom prst="roundRect">
+            <a:avLst/>
+          </a:prstGeom>
+          <a:solidFill>
+            <a:srgbClr val="FFFFFF"/>
+          </a:solidFill>
+          <a:ln w="19050">
+            <a:solidFill>
+              <a:srgbClr val="E2E8F0"/>
+            </a:solidFill>
+          </a:ln>
+        </p:spPr>
+        <p:style>
+          <a:lnRef idx="1">
+            <a:schemeClr val="accent1"/>
+          </a:lnRef>
+          <a:fillRef idx="3">
+            <a:schemeClr val="accent1"/>
+          </a:fillRef>
+          <a:effectRef idx="2">
+            <a:schemeClr val="accent1"/>
+          </a:effectRef>
+          <a:fontRef idx="minor">
+            <a:schemeClr val="lt1"/>
+          </a:fontRef>
+        </p:style>
+        <p:txBody>
+          <a:bodyPr rtlCol="0" anchor="ctr" wrap="square" lIns="228600" tIns="182880" rIns="228600" bIns="182880"/>
+          <a:lstStyle/>
+          <a:p>
+            <a:pPr algn="ctr">
+              <a:defRPr b="1" sz="1500">
+                <a:solidFill>
+                  <a:srgbClr val="1E3A8A"/>
+                </a:solidFill>
+              </a:defRPr>
+            </a:pPr>
+            <a:r>
+              <a:t>Навигация Breadcrumbs</a:t>
             </a:r>
           </a:p>
           <a:p>
             <a:pPr>
               <a:spcBef>
-                <a:spcPts val="1000"/>
+                <a:spcPts val="600"/>
               </a:spcBef>
-            </a:pPr>
-            <a:r>
-              <a:rPr b="1" sz="1400">
-                <a:solidFill>
-                  <a:srgbClr val="1E293B"/>
-                </a:solidFill>
-              </a:rPr>
-              <a:t>Breadcrumbs трохички (#25): </a:t>
-            </a:r>
-            <a:r>
-              <a:rPr sz="1400">
+              <a:defRPr sz="1300">
                 <a:solidFill>
                   <a:srgbClr val="475569"/>
                 </a:solidFill>
-              </a:rPr>
-              <a:t>Визуална пътека за потребителя (Начало &gt; Услуги &gt; Ремонт на ABS), подкрепена от JSON-LD BreadcrumbList.</a:t>
+              </a:defRPr>
+            </a:pPr>
+            <a:r>
+              <a:t>Всяка сервизна страница съдържа хлябни трохички (Начало &gt; Услуги &gt; Ремонт на ABS), описани с BreadcrumbList схема.</a:t>
+            </a:r>
+          </a:p>
+        </p:txBody>
+      </p:sp>
+      <p:sp>
+        <p:nvSpPr>
+          <p:cNvPr id="8" name="Rounded Rectangle 7"/>
+          <p:cNvSpPr/>
+          <p:nvPr/>
+        </p:nvSpPr>
+        <p:spPr>
+          <a:xfrm>
+            <a:off x="731520" y="3931920"/>
+            <a:ext cx="5120640" cy="2103120"/>
+          </a:xfrm>
+          <a:prstGeom prst="roundRect">
+            <a:avLst/>
+          </a:prstGeom>
+          <a:solidFill>
+            <a:srgbClr val="FFFFFF"/>
+          </a:solidFill>
+          <a:ln w="19050">
+            <a:solidFill>
+              <a:srgbClr val="E2E8F0"/>
+            </a:solidFill>
+          </a:ln>
+        </p:spPr>
+        <p:style>
+          <a:lnRef idx="1">
+            <a:schemeClr val="accent1"/>
+          </a:lnRef>
+          <a:fillRef idx="3">
+            <a:schemeClr val="accent1"/>
+          </a:fillRef>
+          <a:effectRef idx="2">
+            <a:schemeClr val="accent1"/>
+          </a:effectRef>
+          <a:fontRef idx="minor">
+            <a:schemeClr val="lt1"/>
+          </a:fontRef>
+        </p:style>
+        <p:txBody>
+          <a:bodyPr rtlCol="0" anchor="ctr" wrap="square" lIns="228600" tIns="182880" rIns="228600" bIns="182880"/>
+          <a:lstStyle/>
+          <a:p>
+            <a:pPr algn="ctr">
+              <a:defRPr b="1" sz="1500">
+                <a:solidFill>
+                  <a:srgbClr val="1E3A8A"/>
+                </a:solidFill>
+              </a:defRPr>
+            </a:pPr>
+            <a:r>
+              <a:t>Facebook Open Graph тагове</a:t>
             </a:r>
           </a:p>
           <a:p>
             <a:pPr>
               <a:spcBef>
-                <a:spcPts val="1000"/>
+                <a:spcPts val="600"/>
               </a:spcBef>
-            </a:pPr>
-            <a:r>
-              <a:rPr b="1" sz="1400">
-                <a:solidFill>
-                  <a:srgbClr val="1E293B"/>
-                </a:solidFill>
-              </a:rPr>
-              <a:t>Facebook Open Graph (#24): </a:t>
-            </a:r>
-            <a:r>
-              <a:rPr sz="1400">
+              <a:defRPr sz="1300">
                 <a:solidFill>
                   <a:srgbClr val="475569"/>
                 </a:solidFill>
-              </a:rPr>
-              <a:t>На всяка страница са конфигурирани og:title, og:description, og:url, og:image (1200x630 банер) за красиво споделяне в социални мрежи.</a:t>
+              </a:defRPr>
+            </a:pPr>
+            <a:r>
+              <a:t>На всички 11 страници са конфигурирани og:title, og:description, og:url и персонализиран банер (1200x630 px) за красиво споделяне.</a:t>
+            </a:r>
+          </a:p>
+        </p:txBody>
+      </p:sp>
+      <p:sp>
+        <p:nvSpPr>
+          <p:cNvPr id="9" name="Rounded Rectangle 8"/>
+          <p:cNvSpPr/>
+          <p:nvPr/>
+        </p:nvSpPr>
+        <p:spPr>
+          <a:xfrm>
+            <a:off x="6309360" y="3931920"/>
+            <a:ext cx="5120640" cy="2103120"/>
+          </a:xfrm>
+          <a:prstGeom prst="roundRect">
+            <a:avLst/>
+          </a:prstGeom>
+          <a:solidFill>
+            <a:srgbClr val="FFFFFF"/>
+          </a:solidFill>
+          <a:ln w="19050">
+            <a:solidFill>
+              <a:srgbClr val="E2E8F0"/>
+            </a:solidFill>
+          </a:ln>
+        </p:spPr>
+        <p:style>
+          <a:lnRef idx="1">
+            <a:schemeClr val="accent1"/>
+          </a:lnRef>
+          <a:fillRef idx="3">
+            <a:schemeClr val="accent1"/>
+          </a:fillRef>
+          <a:effectRef idx="2">
+            <a:schemeClr val="accent1"/>
+          </a:effectRef>
+          <a:fontRef idx="minor">
+            <a:schemeClr val="lt1"/>
+          </a:fontRef>
+        </p:style>
+        <p:txBody>
+          <a:bodyPr rtlCol="0" anchor="ctr" wrap="square" lIns="228600" tIns="182880" rIns="228600" bIns="182880"/>
+          <a:lstStyle/>
+          <a:p>
+            <a:pPr algn="ctr">
+              <a:defRPr b="1" sz="1500">
+                <a:solidFill>
+                  <a:srgbClr val="1E3A8A"/>
+                </a:solidFill>
+              </a:defRPr>
+            </a:pPr>
+            <a:r>
+              <a:t>Интеграция с инструменти</a:t>
             </a:r>
           </a:p>
           <a:p>
             <a:pPr>
               <a:spcBef>
-                <a:spcPts val="1000"/>
+                <a:spcPts val="600"/>
               </a:spcBef>
-            </a:pPr>
-            <a:r>
-              <a:rPr b="1" sz="1400">
-                <a:solidFill>
-                  <a:srgbClr val="1E293B"/>
-                </a:solidFill>
-              </a:rPr>
-              <a:t>Search Console &amp; Analytics (#26): </a:t>
-            </a:r>
-            <a:r>
-              <a:rPr sz="1400">
+              <a:defRPr sz="1300">
                 <a:solidFill>
                   <a:srgbClr val="475569"/>
                 </a:solidFill>
-              </a:rPr>
-              <a:t>Интегрирани верификационен мета таг за Google Search Console и скрипт за Google Analytics 4.</a:t>
+              </a:defRPr>
+            </a:pPr>
+            <a:r>
+              <a:t>Добавени са верификационен таг за Google Search Console и готов скрипт за Google Analytics 4.</a:t>
             </a:r>
           </a:p>
         </p:txBody>
@@ -4590,14 +7104,100 @@
       <p:grpSpPr/>
       <p:sp>
         <p:nvSpPr>
-          <p:cNvPr id="2" name="TextBox 1"/>
+          <p:cNvPr id="2" name="Rectangle 1"/>
+          <p:cNvSpPr/>
+          <p:nvPr/>
+        </p:nvSpPr>
+        <p:spPr>
+          <a:xfrm>
+            <a:off x="0" y="0"/>
+            <a:ext cx="12191695" cy="6858000"/>
+          </a:xfrm>
+          <a:prstGeom prst="rect">
+            <a:avLst/>
+          </a:prstGeom>
+          <a:solidFill>
+            <a:srgbClr val="F8FAFC"/>
+          </a:solidFill>
+          <a:ln>
+            <a:noFill/>
+          </a:ln>
+        </p:spPr>
+        <p:style>
+          <a:lnRef idx="1">
+            <a:schemeClr val="accent1"/>
+          </a:lnRef>
+          <a:fillRef idx="3">
+            <a:schemeClr val="accent1"/>
+          </a:fillRef>
+          <a:effectRef idx="2">
+            <a:schemeClr val="accent1"/>
+          </a:effectRef>
+          <a:fontRef idx="minor">
+            <a:schemeClr val="lt1"/>
+          </a:fontRef>
+        </p:style>
+        <p:txBody>
+          <a:bodyPr rtlCol="0" anchor="ctr"/>
+          <a:lstStyle/>
+          <a:p>
+            <a:pPr algn="ctr"/>
+          </a:p>
+        </p:txBody>
+      </p:sp>
+      <p:sp>
+        <p:nvSpPr>
+          <p:cNvPr id="3" name="Rectangle 2"/>
+          <p:cNvSpPr/>
+          <p:nvPr/>
+        </p:nvSpPr>
+        <p:spPr>
+          <a:xfrm>
+            <a:off x="0" y="0"/>
+            <a:ext cx="12191695" cy="109728"/>
+          </a:xfrm>
+          <a:prstGeom prst="rect">
+            <a:avLst/>
+          </a:prstGeom>
+          <a:solidFill>
+            <a:srgbClr val="0284C7"/>
+          </a:solidFill>
+          <a:ln>
+            <a:noFill/>
+          </a:ln>
+        </p:spPr>
+        <p:style>
+          <a:lnRef idx="1">
+            <a:schemeClr val="accent1"/>
+          </a:lnRef>
+          <a:fillRef idx="3">
+            <a:schemeClr val="accent1"/>
+          </a:fillRef>
+          <a:effectRef idx="2">
+            <a:schemeClr val="accent1"/>
+          </a:effectRef>
+          <a:fontRef idx="minor">
+            <a:schemeClr val="lt1"/>
+          </a:fontRef>
+        </p:style>
+        <p:txBody>
+          <a:bodyPr rtlCol="0" anchor="ctr"/>
+          <a:lstStyle/>
+          <a:p>
+            <a:pPr algn="ctr"/>
+          </a:p>
+        </p:txBody>
+      </p:sp>
+      <p:sp>
+        <p:nvSpPr>
+          <p:cNvPr id="4" name="TextBox 3"/>
           <p:cNvSpPr txBox="1"/>
           <p:nvPr/>
         </p:nvSpPr>
         <p:spPr>
           <a:xfrm>
-            <a:off x="731520" y="457200"/>
-            <a:ext cx="7680960" cy="1097280"/>
+            <a:off x="731520" y="365760"/>
+            <a:ext cx="10698480" cy="1005840"/>
           </a:xfrm>
           <a:prstGeom prst="rect">
             <a:avLst/>
@@ -4605,7 +7205,7 @@
           <a:noFill/>
         </p:spPr>
         <p:txBody>
-          <a:bodyPr wrap="square">
+          <a:bodyPr wrap="square" lIns="0" tIns="0" rIns="0" bIns="0">
             <a:spAutoFit/>
           </a:bodyPr>
           <a:lstStyle/>
@@ -4613,38 +7213,41 @@
             <a:pPr>
               <a:defRPr sz="1100" b="1">
                 <a:solidFill>
-                  <a:srgbClr val="2563EB"/>
-                </a:solidFill>
-              </a:defRPr>
-            </a:pPr>
-            <a:r>
-              <a:t>CSCB700 - ОПТИМИЗАЦИЯ ЗА ТЪРСАЧКИ В УЕБ</a:t>
-            </a:r>
-          </a:p>
-          <a:p>
-            <a:pPr>
+                  <a:srgbClr val="0284C7"/>
+                </a:solidFill>
+              </a:defRPr>
+            </a:pPr>
+            <a:r>
+              <a:t>CSCB700 • ОПТИМИЗАЦИЯ ЗА ТЪРСАЧКИ В УЕБ</a:t>
+            </a:r>
+          </a:p>
+          <a:p>
+            <a:pPr>
+              <a:spcBef>
+                <a:spcPts val="400"/>
+              </a:spcBef>
               <a:defRPr sz="2200" b="1">
                 <a:solidFill>
-                  <a:srgbClr val="0F172A"/>
-                </a:solidFill>
-              </a:defRPr>
-            </a:pPr>
-            <a:r>
-              <a:t>8. Локално SEO и правна сигурност (Изисквания #22, #23)</a:t>
-            </a:r>
-          </a:p>
-        </p:txBody>
-      </p:sp>
-      <p:sp>
-        <p:nvSpPr>
-          <p:cNvPr id="3" name="TextBox 2"/>
+                  <a:srgbClr val="1E3A8A"/>
+                </a:solidFill>
+              </a:defRPr>
+            </a:pPr>
+            <a:r>
+              <a:t>Локално присъствие и правна сигурност</a:t>
+            </a:r>
+          </a:p>
+        </p:txBody>
+      </p:sp>
+      <p:sp>
+        <p:nvSpPr>
+          <p:cNvPr id="5" name="TextBox 4"/>
           <p:cNvSpPr txBox="1"/>
           <p:nvPr/>
         </p:nvSpPr>
         <p:spPr>
           <a:xfrm>
-            <a:off x="731520" y="1645920"/>
-            <a:ext cx="7680960" cy="4389120"/>
+            <a:off x="731520" y="6309360"/>
+            <a:ext cx="10698480" cy="365760"/>
           </a:xfrm>
           <a:prstGeom prst="rect">
             <a:avLst/>
@@ -4652,95 +7255,317 @@
           <a:noFill/>
         </p:spPr>
         <p:txBody>
-          <a:bodyPr wrap="square">
+          <a:bodyPr wrap="none" lIns="0" tIns="0" rIns="0" bIns="0">
             <a:spAutoFit/>
           </a:bodyPr>
           <a:lstStyle/>
           <a:p>
-            <a:r>
-              <a:rPr b="1" sz="1400">
-                <a:solidFill>
-                  <a:srgbClr val="1E293B"/>
-                </a:solidFill>
-              </a:rPr>
-              <a:t>Google Map с пин (#23): </a:t>
-            </a:r>
-            <a:r>
-              <a:rPr sz="1400">
+            <a:pPr>
+              <a:defRPr sz="1000">
+                <a:solidFill>
+                  <a:srgbClr val="94A3B8"/>
+                </a:solidFill>
+              </a:defRPr>
+            </a:pPr>
+            <a:r>
+              <a:t>AutoElektronik — Лабораторен сервиз за автоелектроника | Преподавател: Елисавета Тричкова-Кашъмова</a:t>
+            </a:r>
+          </a:p>
+        </p:txBody>
+      </p:sp>
+      <p:sp>
+        <p:nvSpPr>
+          <p:cNvPr id="6" name="Rounded Rectangle 5"/>
+          <p:cNvSpPr/>
+          <p:nvPr/>
+        </p:nvSpPr>
+        <p:spPr>
+          <a:xfrm>
+            <a:off x="731520" y="1554480"/>
+            <a:ext cx="3291840" cy="4297680"/>
+          </a:xfrm>
+          <a:prstGeom prst="roundRect">
+            <a:avLst/>
+          </a:prstGeom>
+          <a:solidFill>
+            <a:srgbClr val="FFFFFF"/>
+          </a:solidFill>
+          <a:ln w="19050">
+            <a:solidFill>
+              <a:srgbClr val="E2E8F0"/>
+            </a:solidFill>
+          </a:ln>
+        </p:spPr>
+        <p:style>
+          <a:lnRef idx="1">
+            <a:schemeClr val="accent1"/>
+          </a:lnRef>
+          <a:fillRef idx="3">
+            <a:schemeClr val="accent1"/>
+          </a:fillRef>
+          <a:effectRef idx="2">
+            <a:schemeClr val="accent1"/>
+          </a:effectRef>
+          <a:fontRef idx="minor">
+            <a:schemeClr val="lt1"/>
+          </a:fontRef>
+        </p:style>
+        <p:txBody>
+          <a:bodyPr rtlCol="0" anchor="ctr" wrap="square" lIns="228600" tIns="228600" rIns="228600" bIns="228600"/>
+          <a:lstStyle/>
+          <a:p>
+            <a:pPr algn="ctr">
+              <a:defRPr b="1" sz="1600">
+                <a:solidFill>
+                  <a:srgbClr val="1E3A8A"/>
+                </a:solidFill>
+              </a:defRPr>
+            </a:pPr>
+            <a:r>
+              <a:t>Локация с интерактивна карта</a:t>
+            </a:r>
+          </a:p>
+          <a:p>
+            <a:pPr>
+              <a:spcBef>
+                <a:spcPts val="800"/>
+              </a:spcBef>
+              <a:defRPr sz="1200">
                 <a:solidFill>
                   <a:srgbClr val="475569"/>
                 </a:solidFill>
-              </a:rPr>
-              <a:t>Интерактивна карта на страницата с контакти с точен адрес (бул. Цариградско шосе №115, София) и GPS координати.</a:t>
+              </a:defRPr>
+            </a:pPr>
+            <a:r>
+              <a:t>• Интегрирана Google Maps карта с маркер на страницата за контакти</a:t>
             </a:r>
           </a:p>
           <a:p>
             <a:pPr>
               <a:spcBef>
-                <a:spcPts val="1000"/>
+                <a:spcPts val="800"/>
               </a:spcBef>
-            </a:pPr>
-            <a:r>
-              <a:rPr b="1" sz="1400">
-                <a:solidFill>
-                  <a:srgbClr val="1E293B"/>
-                </a:solidFill>
-              </a:rPr>
-              <a:t>Локална оптимизация: </a:t>
-            </a:r>
-            <a:r>
-              <a:rPr sz="1400">
+              <a:defRPr sz="1200">
                 <a:solidFill>
                   <a:srgbClr val="475569"/>
                 </a:solidFill>
-              </a:rPr>
-              <a:t>Фокус върху локални търсения: 'ремонт на ABS модул София', 'сервиз за автоелектроника София'.</a:t>
+              </a:defRPr>
+            </a:pPr>
+            <a:r>
+              <a:t>• Точен сервизен адрес: гр. София, бул. Цариградско шосе №115</a:t>
             </a:r>
           </a:p>
           <a:p>
             <a:pPr>
               <a:spcBef>
-                <a:spcPts val="1000"/>
+                <a:spcPts val="800"/>
               </a:spcBef>
-            </a:pPr>
-            <a:r>
-              <a:rPr b="1" sz="1400">
-                <a:solidFill>
-                  <a:srgbClr val="1E293B"/>
-                </a:solidFill>
-              </a:rPr>
-              <a:t>Условия за ползване (#22): </a:t>
-            </a:r>
-            <a:r>
-              <a:rPr sz="1400">
+              <a:defRPr sz="1200">
                 <a:solidFill>
                   <a:srgbClr val="475569"/>
                 </a:solidFill>
-              </a:rPr>
-              <a:t>Официална легална страница с регламент за приемане на модули по куриер, стендови тестове и гаранционни условия.</a:t>
+              </a:defRPr>
+            </a:pPr>
+            <a:r>
+              <a:t>• GPS координати за директна автомобилна навигация</a:t>
+            </a:r>
+          </a:p>
+        </p:txBody>
+      </p:sp>
+      <p:sp>
+        <p:nvSpPr>
+          <p:cNvPr id="7" name="Rounded Rectangle 6"/>
+          <p:cNvSpPr/>
+          <p:nvPr/>
+        </p:nvSpPr>
+        <p:spPr>
+          <a:xfrm>
+            <a:off x="4389120" y="1554480"/>
+            <a:ext cx="3291840" cy="4297680"/>
+          </a:xfrm>
+          <a:prstGeom prst="roundRect">
+            <a:avLst/>
+          </a:prstGeom>
+          <a:solidFill>
+            <a:srgbClr val="FFFFFF"/>
+          </a:solidFill>
+          <a:ln w="19050">
+            <a:solidFill>
+              <a:srgbClr val="E2E8F0"/>
+            </a:solidFill>
+          </a:ln>
+        </p:spPr>
+        <p:style>
+          <a:lnRef idx="1">
+            <a:schemeClr val="accent1"/>
+          </a:lnRef>
+          <a:fillRef idx="3">
+            <a:schemeClr val="accent1"/>
+          </a:fillRef>
+          <a:effectRef idx="2">
+            <a:schemeClr val="accent1"/>
+          </a:effectRef>
+          <a:fontRef idx="minor">
+            <a:schemeClr val="lt1"/>
+          </a:fontRef>
+        </p:style>
+        <p:txBody>
+          <a:bodyPr rtlCol="0" anchor="ctr" wrap="square" lIns="228600" tIns="228600" rIns="228600" bIns="228600"/>
+          <a:lstStyle/>
+          <a:p>
+            <a:pPr algn="ctr">
+              <a:defRPr b="1" sz="1600">
+                <a:solidFill>
+                  <a:srgbClr val="1E3A8A"/>
+                </a:solidFill>
+              </a:defRPr>
+            </a:pPr>
+            <a:r>
+              <a:t>Локална оптимизация в София</a:t>
             </a:r>
           </a:p>
           <a:p>
             <a:pPr>
               <a:spcBef>
-                <a:spcPts val="1000"/>
+                <a:spcPts val="800"/>
               </a:spcBef>
-            </a:pPr>
-            <a:r>
-              <a:rPr b="1" sz="1400">
-                <a:solidFill>
-                  <a:srgbClr val="1E293B"/>
-                </a:solidFill>
-              </a:rPr>
-              <a:t>Защита на данните GDPR (#22): </a:t>
-            </a:r>
-            <a:r>
-              <a:rPr sz="1400">
+              <a:defRPr sz="1200">
                 <a:solidFill>
                   <a:srgbClr val="475569"/>
                 </a:solidFill>
-              </a:rPr>
-              <a:t>Пълно съответствие с европейския Регламент 2016/679 за обработка на клиентски данни.</a:t>
+              </a:defRPr>
+            </a:pPr>
+            <a:r>
+              <a:t>• Целеви ключови думи за столицата ('автодиагностика софия', 'ремонт на ABS софия')</a:t>
+            </a:r>
+          </a:p>
+          <a:p>
+            <a:pPr>
+              <a:spcBef>
+                <a:spcPts val="800"/>
+              </a:spcBef>
+              <a:defRPr sz="1200">
+                <a:solidFill>
+                  <a:srgbClr val="475569"/>
+                </a:solidFill>
+              </a:defRPr>
+            </a:pPr>
+            <a:r>
+              <a:t>• Възможност за приемане на модули по куриер за клиенти от провинцията</a:t>
+            </a:r>
+          </a:p>
+          <a:p>
+            <a:pPr>
+              <a:spcBef>
+                <a:spcPts val="800"/>
+              </a:spcBef>
+              <a:defRPr sz="1200">
+                <a:solidFill>
+                  <a:srgbClr val="475569"/>
+                </a:solidFill>
+              </a:defRPr>
+            </a:pPr>
+            <a:r>
+              <a:t>• Ясно посочено работно време и телефон за спешни случаи</a:t>
+            </a:r>
+          </a:p>
+        </p:txBody>
+      </p:sp>
+      <p:sp>
+        <p:nvSpPr>
+          <p:cNvPr id="8" name="Rounded Rectangle 7"/>
+          <p:cNvSpPr/>
+          <p:nvPr/>
+        </p:nvSpPr>
+        <p:spPr>
+          <a:xfrm>
+            <a:off x="8046720" y="1554480"/>
+            <a:ext cx="3291840" cy="4297680"/>
+          </a:xfrm>
+          <a:prstGeom prst="roundRect">
+            <a:avLst/>
+          </a:prstGeom>
+          <a:solidFill>
+            <a:srgbClr val="FFFFFF"/>
+          </a:solidFill>
+          <a:ln w="19050">
+            <a:solidFill>
+              <a:srgbClr val="E2E8F0"/>
+            </a:solidFill>
+          </a:ln>
+        </p:spPr>
+        <p:style>
+          <a:lnRef idx="1">
+            <a:schemeClr val="accent1"/>
+          </a:lnRef>
+          <a:fillRef idx="3">
+            <a:schemeClr val="accent1"/>
+          </a:fillRef>
+          <a:effectRef idx="2">
+            <a:schemeClr val="accent1"/>
+          </a:effectRef>
+          <a:fontRef idx="minor">
+            <a:schemeClr val="lt1"/>
+          </a:fontRef>
+        </p:style>
+        <p:txBody>
+          <a:bodyPr rtlCol="0" anchor="ctr" wrap="square" lIns="228600" tIns="228600" rIns="228600" bIns="228600"/>
+          <a:lstStyle/>
+          <a:p>
+            <a:pPr algn="ctr">
+              <a:defRPr b="1" sz="1600">
+                <a:solidFill>
+                  <a:srgbClr val="1E3A8A"/>
+                </a:solidFill>
+              </a:defRPr>
+            </a:pPr>
+            <a:r>
+              <a:t>Легална прозрачност (GDPR)</a:t>
+            </a:r>
+          </a:p>
+          <a:p>
+            <a:pPr>
+              <a:spcBef>
+                <a:spcPts val="800"/>
+              </a:spcBef>
+              <a:defRPr sz="1200">
+                <a:solidFill>
+                  <a:srgbClr val="475569"/>
+                </a:solidFill>
+              </a:defRPr>
+            </a:pPr>
+            <a:r>
+              <a:t>• Самостоятелна страница с Общи условия за гаранция до 24 месеца</a:t>
+            </a:r>
+          </a:p>
+          <a:p>
+            <a:pPr>
+              <a:spcBef>
+                <a:spcPts val="800"/>
+              </a:spcBef>
+              <a:defRPr sz="1200">
+                <a:solidFill>
+                  <a:srgbClr val="475569"/>
+                </a:solidFill>
+              </a:defRPr>
+            </a:pPr>
+            <a:r>
+              <a:t>• Политика за защита на личните данни по Регламент (ЕС) 2016/679</a:t>
+            </a:r>
+          </a:p>
+          <a:p>
+            <a:pPr>
+              <a:spcBef>
+                <a:spcPts val="800"/>
+              </a:spcBef>
+              <a:defRPr sz="1200">
+                <a:solidFill>
+                  <a:srgbClr val="475569"/>
+                </a:solidFill>
+              </a:defRPr>
+            </a:pPr>
+            <a:r>
+              <a:t>• Пълно съответствие със съвременните европейски стандарти</a:t>
             </a:r>
           </a:p>
         </p:txBody>
